--- a/docs/presentations/Salanor-Automation-Governance-Finance.pptx
+++ b/docs/presentations/Salanor-Automation-Governance-Finance.pptx
@@ -25,6 +25,8 @@
     <p:sldId id="273" r:id="rId25"/>
     <p:sldId id="274" r:id="rId26"/>
     <p:sldId id="275" r:id="rId27"/>
+    <p:sldId id="276" r:id="rId28"/>
+    <p:sldId id="277" r:id="rId29"/>
   </p:sldIdLst>
   <p:sldSz cx="9144000" cy="6858000" type="screen4x3"/>
   <p:notesSz cx="6858000" cy="9144000"/>
@@ -591,7 +593,7 @@
           <a:lstStyle/>
           <a:p>
             <a:r>
-              <a:t>POPIA if SA audience. Universal point: evidence not efficiency alone.</a:t>
+              <a:t>Answer to: our systems have no issues. Never say their stack is broken.</a:t>
             </a:r>
           </a:p>
         </p:txBody>
@@ -661,7 +663,7 @@
           <a:lstStyle/>
           <a:p>
             <a:r>
-              <a:t>Act 3 begins. Salanor implements + embeds Aegis from day one.</a:t>
+              <a:t>POPIA if SA audience. Universal point: evidence not efficiency alone.</a:t>
             </a:r>
           </a:p>
         </p:txBody>
@@ -731,7 +733,7 @@
           <a:lstStyle/>
           <a:p>
             <a:r>
-              <a:t>Not only software vendor — design + implement + Aegis.</a:t>
+              <a:t>Act 3 begins. Salanor implements + embeds Aegis from day one.</a:t>
             </a:r>
           </a:p>
         </p:txBody>
@@ -801,7 +803,7 @@
           <a:lstStyle/>
           <a:p>
             <a:r>
-              <a:t>BYOK for production; Workflow Bridge for orchestrators in demo.</a:t>
+              <a:t>Not only software vendor — design + implement + Aegis.</a:t>
             </a:r>
           </a:p>
         </p:txBody>
@@ -871,7 +873,7 @@
           <a:lstStyle/>
           <a:p>
             <a:r>
-              <a:t>No rip-and-replace.</a:t>
+              <a:t>BYOK for production; Workflow Bridge for orchestrators in demo.</a:t>
             </a:r>
           </a:p>
         </p:txBody>
@@ -941,7 +943,7 @@
           <a:lstStyle/>
           <a:p>
             <a:r>
-              <a:t>10 min demo. See NOTES.md for full script. Loom backup if network fails.</a:t>
+              <a:t>No rip-and-replace.</a:t>
             </a:r>
           </a:p>
         </p:txBody>
@@ -1011,7 +1013,7 @@
           <a:lstStyle/>
           <a:p>
             <a:r>
-              <a:t>What risk committees and internal audit need.</a:t>
+              <a:t>10 min demo. See NOTES.md for full script. Loom backup if network fails.</a:t>
             </a:r>
           </a:p>
         </p:txBody>
@@ -1081,7 +1083,7 @@
           <a:lstStyle/>
           <a:p>
             <a:r>
-              <a:t>POPIA: accountability easier with complete verifiable record vs email trails.</a:t>
+              <a:t>What risk committees and internal audit need.</a:t>
             </a:r>
           </a:p>
         </p:txBody>
@@ -1151,7 +1153,7 @@
           <a:lstStyle/>
           <a:p>
             <a:r>
-              <a:t>Do not over-promise custom scope beyond pilot without discovery.</a:t>
+              <a:t>POPIA: accountability easier with complete verifiable record vs email trails.</a:t>
             </a:r>
           </a:p>
         </p:txBody>
@@ -1221,7 +1223,7 @@
           <a:lstStyle/>
           <a:p>
             <a:r>
-              <a:t>Listen more than talk.</a:t>
+              <a:t>You sell implementation + Aegis. Not SaaS alone. Not design partner.</a:t>
             </a:r>
           </a:p>
         </p:txBody>
@@ -1317,6 +1319,76 @@
 </file>
 
 <file path=ppt/notesSlides/notesSlide20.xml><?xml version="1.0" encoding="utf-8"?>
+<p:notes xmlns:a="http://schemas.openxmlformats.org/drawingml/2006/main" xmlns:p="http://schemas.openxmlformats.org/presentationml/2006/main" xmlns:r="http://schemas.openxmlformats.org/officeDocument/2006/relationships">
+  <p:cSld>
+    <p:spTree>
+      <p:nvGrpSpPr>
+        <p:cNvPr id="1" name=""/>
+        <p:cNvGrpSpPr/>
+        <p:nvPr/>
+      </p:nvGrpSpPr>
+      <p:grpSpPr>
+        <a:xfrm>
+          <a:off x="0" y="0"/>
+          <a:ext cx="0" cy="0"/>
+          <a:chOff x="0" y="0"/>
+          <a:chExt cx="0" cy="0"/>
+        </a:xfrm>
+      </p:grpSpPr>
+      <p:sp>
+        <p:nvSpPr>
+          <p:cNvPr id="2" name="Slide Image Placeholder 1"/>
+          <p:cNvSpPr>
+            <a:spLocks noGrp="1"/>
+          </p:cNvSpPr>
+          <p:nvPr>
+            <p:ph type="sldImg" idx="2"/>
+          </p:nvPr>
+        </p:nvSpPr>
+        <p:spPr/>
+      </p:sp>
+      <p:sp>
+        <p:nvSpPr>
+          <p:cNvPr id="3" name="Notes Placeholder 2"/>
+          <p:cNvSpPr>
+            <a:spLocks noGrp="1"/>
+          </p:cNvSpPr>
+          <p:nvPr>
+            <p:ph type="body" idx="3" sz="quarter"/>
+          </p:nvPr>
+        </p:nvSpPr>
+        <p:spPr/>
+        <p:txBody>
+          <a:bodyPr/>
+          <a:lstStyle/>
+          <a:p>
+            <a:r>
+              <a:t>Shared deck CTA. In person: book the 45 min scoping before leaving the room.</a:t>
+            </a:r>
+          </a:p>
+        </p:txBody>
+      </p:sp>
+      <p:sp>
+        <p:nvSpPr>
+          <p:cNvPr id="4" name="Slide Number Placeholder 3"/>
+          <p:cNvSpPr>
+            <a:spLocks noGrp="1"/>
+          </p:cNvSpPr>
+          <p:nvPr>
+            <p:ph type="sldNum" idx="5" sz="quarter"/>
+          </p:nvPr>
+        </p:nvSpPr>
+        <p:spPr/>
+      </p:sp>
+    </p:spTree>
+  </p:cSld>
+  <p:clrMapOvr>
+    <a:masterClrMapping/>
+  </p:clrMapOvr>
+</p:notes>
+</file>
+
+<file path=ppt/notesSlides/notesSlide21.xml><?xml version="1.0" encoding="utf-8"?>
 <p:notes xmlns:a="http://schemas.openxmlformats.org/drawingml/2006/main" xmlns:p="http://schemas.openxmlformats.org/presentationml/2006/main" xmlns:r="http://schemas.openxmlformats.org/officeDocument/2006/relationships">
   <p:cSld>
     <p:spTree>
@@ -5012,7 +5084,7 @@
                 </a:solidFill>
                 <a:latin typeface="Segoe UI"/>
               </a:rPr>
-              <a:t>Operational impact, controlled risk, and proof you can show — payments, claims, KYC, and sensitive workflows.</a:t>
+              <a:t>We automate your critical workflows and build in Aegis from day one: speed, control, and proof for payments, claims, and KYC.</a:t>
             </a:r>
           </a:p>
         </p:txBody>
@@ -5167,7 +5239,7 @@
                 </a:solidFill>
                 <a:latin typeface="Segoe UI"/>
               </a:rPr>
-              <a:t>REGULATORY &amp; TRUST</a:t>
+              <a:t>YOUR SYSTEMS WORK</a:t>
             </a:r>
           </a:p>
         </p:txBody>
@@ -5202,7 +5274,7 @@
                 </a:solidFill>
                 <a:latin typeface="Segoe UI"/>
               </a:rPr>
-              <a:t>Accountability applies whether you automate or not</a:t>
+              <a:t>This is not a fix for outages. It unlocks the next automation project.</a:t>
             </a:r>
           </a:p>
         </p:txBody>
@@ -5259,7 +5331,7 @@
         <p:spPr>
           <a:xfrm>
             <a:off x="594360" y="2148840"/>
-            <a:ext cx="3931920" cy="3200400"/>
+            <a:ext cx="7955279" cy="3200400"/>
           </a:xfrm>
           <a:prstGeom prst="rect">
             <a:avLst/>
@@ -5278,13 +5350,13 @@
               </a:spcAft>
             </a:pPr>
             <a:r>
-              <a:rPr sz="1200">
+              <a:rPr sz="1300">
                 <a:solidFill>
                   <a:srgbClr val="E8EDE9"/>
                 </a:solidFill>
                 <a:latin typeface="Segoe UI"/>
               </a:rPr>
-              <a:t>POPIA (South Africa) — lawful processing &amp; accountability</a:t>
+              <a:t>If core systems run well today, good. The question is what you automate next</a:t>
             </a:r>
           </a:p>
           <a:p>
@@ -5294,13 +5366,13 @@
               </a:spcAft>
             </a:pPr>
             <a:r>
-              <a:rPr sz="1200">
+              <a:rPr sz="1300">
                 <a:solidFill>
                   <a:srgbClr val="E8EDE9"/>
                 </a:solidFill>
                 <a:latin typeface="Segoe UI"/>
               </a:rPr>
-              <a:t>AML / KYC — who approved exceptions</a:t>
+              <a:t>Many teams want AI, scripts, or orchestration. Risk blocks because nobody can prove who authorized what</a:t>
             </a:r>
           </a:p>
           <a:p>
@@ -5310,13 +5382,13 @@
               </a:spcAft>
             </a:pPr>
             <a:r>
-              <a:rPr sz="1200">
+              <a:rPr sz="1300">
                 <a:solidFill>
                   <a:srgbClr val="E8EDE9"/>
                 </a:solidFill>
                 <a:latin typeface="Segoe UI"/>
               </a:rPr>
-              <a:t>Internal audit &amp; SOC-style controls — evidence controls operated</a:t>
+              <a:t>Without a signed approval register, audit reconstruction takes weeks, not hours</a:t>
             </a:r>
           </a:p>
           <a:p>
@@ -5326,72 +5398,27 @@
               </a:spcAft>
             </a:pPr>
             <a:r>
-              <a:rPr sz="1200">
+              <a:rPr sz="1300">
                 <a:solidFill>
                   <a:srgbClr val="E8EDE9"/>
                 </a:solidFill>
                 <a:latin typeface="Segoe UI"/>
               </a:rPr>
-              <a:t>EU AI Act, SOC 2 — relevant for international groups</a:t>
-            </a:r>
-          </a:p>
-        </p:txBody>
-      </p:sp>
-      <p:sp>
-        <p:nvSpPr>
-          <p:cNvPr id="8" name="Rounded Rectangle 7"/>
-          <p:cNvSpPr/>
-          <p:nvPr/>
-        </p:nvSpPr>
-        <p:spPr>
-          <a:xfrm>
-            <a:off x="4709160" y="2148840"/>
-            <a:ext cx="3611880" cy="2148840"/>
-          </a:xfrm>
-          <a:prstGeom prst="roundRect">
-            <a:avLst/>
-          </a:prstGeom>
-          <a:solidFill>
-            <a:srgbClr val="141917"/>
-          </a:solidFill>
-          <a:ln w="9525">
-            <a:solidFill>
-              <a:srgbClr val="273A38"/>
-            </a:solidFill>
-          </a:ln>
-        </p:spPr>
-        <p:style>
-          <a:lnRef idx="1">
-            <a:schemeClr val="accent1"/>
-          </a:lnRef>
-          <a:fillRef idx="3">
-            <a:schemeClr val="accent1"/>
-          </a:fillRef>
-          <a:effectRef idx="2">
-            <a:schemeClr val="accent1"/>
-          </a:effectRef>
-          <a:fontRef idx="minor">
-            <a:schemeClr val="lt1"/>
-          </a:fontRef>
-        </p:style>
-        <p:txBody>
-          <a:bodyPr rtlCol="0" anchor="ctr"/>
-          <a:lstStyle/>
-          <a:p>
-            <a:pPr algn="ctr"/>
-          </a:p>
-        </p:txBody>
-      </p:sp>
-      <p:sp>
-        <p:nvSpPr>
-          <p:cNvPr id="9" name="TextBox 8"/>
-          <p:cNvSpPr txBox="1"/>
-          <p:nvPr/>
-        </p:nvSpPr>
-        <p:spPr>
-          <a:xfrm>
-            <a:off x="4892040" y="2331720"/>
-            <a:ext cx="3246120" cy="1645920"/>
+              <a:t>Governed automation lets you say yes to the next project because proof exists from day one</a:t>
+            </a:r>
+          </a:p>
+        </p:txBody>
+      </p:sp>
+      <p:sp>
+        <p:nvSpPr>
+          <p:cNvPr id="8" name="TextBox 7"/>
+          <p:cNvSpPr txBox="1"/>
+          <p:nvPr/>
+        </p:nvSpPr>
+        <p:spPr>
+          <a:xfrm>
+            <a:off x="594360" y="5349240"/>
+            <a:ext cx="7955279" cy="502920"/>
           </a:xfrm>
           <a:prstGeom prst="rect">
             <a:avLst/>
@@ -5406,30 +5433,13 @@
           <a:p>
             <a:pPr algn="l"/>
             <a:r>
-              <a:rPr sz="1300" b="1">
+              <a:rPr sz="1200" b="1">
                 <a:solidFill>
                   <a:srgbClr val="43C2A9"/>
                 </a:solidFill>
                 <a:latin typeface="Segoe UI"/>
               </a:rPr>
-              <a:t>Regulators and boards do not ask:</a:t>
-            </a:r>
-            <a:br/>
-            <a:r>
-              <a:t>“Did the robot run?”</a:t>
-            </a:r>
-            <a:br/>
-            <a:br/>
-            <a:r>
-              <a:t>They ask:</a:t>
-            </a:r>
-            <a:br/>
-            <a:r>
-              <a:t>“Who was responsible,</a:t>
-            </a:r>
-            <a:br/>
-            <a:r>
-              <a:t>and can you prove it?”</a:t>
+              <a:t>Stable systems are an advantage. Salanor helps you add automation without betting the institution.</a:t>
             </a:r>
           </a:p>
         </p:txBody>
@@ -5549,7 +5559,7 @@
                 </a:solidFill>
                 <a:latin typeface="Segoe UI"/>
               </a:rPr>
-              <a:t>YOU NEED BOTH</a:t>
+              <a:t>REGULATORY &amp; TRUST</a:t>
             </a:r>
           </a:p>
         </p:txBody>
@@ -5584,7 +5594,7 @@
                 </a:solidFill>
                 <a:latin typeface="Segoe UI"/>
               </a:rPr>
-              <a:t>Fast operations and provable control</a:t>
+              <a:t>Accountability applies whether you automate or not</a:t>
             </a:r>
           </a:p>
         </p:txBody>
@@ -5634,14 +5644,101 @@
       </p:sp>
       <p:sp>
         <p:nvSpPr>
-          <p:cNvPr id="7" name="Rounded Rectangle 6"/>
+          <p:cNvPr id="7" name="TextBox 6"/>
+          <p:cNvSpPr txBox="1"/>
+          <p:nvPr/>
+        </p:nvSpPr>
+        <p:spPr>
+          <a:xfrm>
+            <a:off x="594360" y="2148840"/>
+            <a:ext cx="3931920" cy="3200400"/>
+          </a:xfrm>
+          <a:prstGeom prst="rect">
+            <a:avLst/>
+          </a:prstGeom>
+          <a:noFill/>
+        </p:spPr>
+        <p:txBody>
+          <a:bodyPr wrap="square">
+            <a:spAutoFit/>
+          </a:bodyPr>
+          <a:lstStyle/>
+          <a:p>
+            <a:pPr>
+              <a:spcAft>
+                <a:spcPts val="600"/>
+              </a:spcAft>
+            </a:pPr>
+            <a:r>
+              <a:rPr sz="1200">
+                <a:solidFill>
+                  <a:srgbClr val="E8EDE9"/>
+                </a:solidFill>
+                <a:latin typeface="Segoe UI"/>
+              </a:rPr>
+              <a:t>POPIA (South Africa): lawful processing and accountability</a:t>
+            </a:r>
+          </a:p>
+          <a:p>
+            <a:pPr>
+              <a:spcAft>
+                <a:spcPts val="600"/>
+              </a:spcAft>
+            </a:pPr>
+            <a:r>
+              <a:rPr sz="1200">
+                <a:solidFill>
+                  <a:srgbClr val="E8EDE9"/>
+                </a:solidFill>
+                <a:latin typeface="Segoe UI"/>
+              </a:rPr>
+              <a:t>AML / KYC: who approved exceptions</a:t>
+            </a:r>
+          </a:p>
+          <a:p>
+            <a:pPr>
+              <a:spcAft>
+                <a:spcPts val="600"/>
+              </a:spcAft>
+            </a:pPr>
+            <a:r>
+              <a:rPr sz="1200">
+                <a:solidFill>
+                  <a:srgbClr val="E8EDE9"/>
+                </a:solidFill>
+                <a:latin typeface="Segoe UI"/>
+              </a:rPr>
+              <a:t>Internal audit and SOC-style controls: evidence controls operated</a:t>
+            </a:r>
+          </a:p>
+          <a:p>
+            <a:pPr>
+              <a:spcAft>
+                <a:spcPts val="600"/>
+              </a:spcAft>
+            </a:pPr>
+            <a:r>
+              <a:rPr sz="1200">
+                <a:solidFill>
+                  <a:srgbClr val="E8EDE9"/>
+                </a:solidFill>
+                <a:latin typeface="Segoe UI"/>
+              </a:rPr>
+              <a:t>EU AI Act, SOC 2: relevant for international groups</a:t>
+            </a:r>
+          </a:p>
+        </p:txBody>
+      </p:sp>
+      <p:sp>
+        <p:nvSpPr>
+          <p:cNvPr id="8" name="Rounded Rectangle 7"/>
           <p:cNvSpPr/>
           <p:nvPr/>
         </p:nvSpPr>
         <p:spPr>
           <a:xfrm>
-            <a:off x="594360" y="2331720"/>
-            <a:ext cx="2514600" cy="2148840"/>
+            <a:off x="4709160" y="2148840"/>
+            <a:ext cx="3611880" cy="2148840"/>
           </a:xfrm>
           <a:prstGeom prst="roundRect">
             <a:avLst/>
@@ -5679,14 +5776,14 @@
       </p:sp>
       <p:sp>
         <p:nvSpPr>
-          <p:cNvPr id="8" name="TextBox 7"/>
-          <p:cNvSpPr txBox="1"/>
-          <p:nvPr/>
-        </p:nvSpPr>
-        <p:spPr>
-          <a:xfrm>
-            <a:off x="758952" y="2532888"/>
-            <a:ext cx="2240280" cy="502920"/>
+          <p:cNvPr id="9" name="TextBox 8"/>
+          <p:cNvSpPr txBox="1"/>
+          <p:nvPr/>
+        </p:nvSpPr>
+        <p:spPr>
+          <a:xfrm>
+            <a:off x="4892040" y="2331720"/>
+            <a:ext cx="3246120" cy="1645920"/>
           </a:xfrm>
           <a:prstGeom prst="rect">
             <a:avLst/>
@@ -5701,278 +5798,30 @@
           <a:p>
             <a:pPr algn="l"/>
             <a:r>
-              <a:rPr sz="1200" b="1">
-                <a:solidFill>
-                  <a:srgbClr val="9EB0AC"/>
-                </a:solidFill>
-                <a:latin typeface="Segoe UI"/>
-              </a:rPr>
-              <a:t>Manual only</a:t>
-            </a:r>
-          </a:p>
-        </p:txBody>
-      </p:sp>
-      <p:sp>
-        <p:nvSpPr>
-          <p:cNvPr id="9" name="TextBox 8"/>
-          <p:cNvSpPr txBox="1"/>
-          <p:nvPr/>
-        </p:nvSpPr>
-        <p:spPr>
-          <a:xfrm>
-            <a:off x="758952" y="3108960"/>
-            <a:ext cx="2240280" cy="1097280"/>
-          </a:xfrm>
-          <a:prstGeom prst="rect">
-            <a:avLst/>
-          </a:prstGeom>
-          <a:noFill/>
-        </p:spPr>
-        <p:txBody>
-          <a:bodyPr wrap="square" anchor="t">
-            <a:spAutoFit/>
-          </a:bodyPr>
-          <a:lstStyle/>
-          <a:p>
-            <a:pPr algn="l"/>
-            <a:r>
-              <a:rPr sz="1100" b="0">
-                <a:solidFill>
-                  <a:srgbClr val="9EB0AC"/>
-                </a:solidFill>
-                <a:latin typeface="Segoe UI"/>
-              </a:rPr>
-              <a:t>Slow, inconsistent, hard to scale</a:t>
-            </a:r>
-          </a:p>
-        </p:txBody>
-      </p:sp>
-      <p:sp>
-        <p:nvSpPr>
-          <p:cNvPr id="10" name="Rounded Rectangle 9"/>
-          <p:cNvSpPr/>
-          <p:nvPr/>
-        </p:nvSpPr>
-        <p:spPr>
-          <a:xfrm>
-            <a:off x="3310128" y="2331720"/>
-            <a:ext cx="2514600" cy="2148840"/>
-          </a:xfrm>
-          <a:prstGeom prst="roundRect">
-            <a:avLst/>
-          </a:prstGeom>
-          <a:solidFill>
-            <a:srgbClr val="141917"/>
-          </a:solidFill>
-          <a:ln w="9525">
-            <a:solidFill>
-              <a:srgbClr val="273A38"/>
-            </a:solidFill>
-          </a:ln>
-        </p:spPr>
-        <p:style>
-          <a:lnRef idx="1">
-            <a:schemeClr val="accent1"/>
-          </a:lnRef>
-          <a:fillRef idx="3">
-            <a:schemeClr val="accent1"/>
-          </a:fillRef>
-          <a:effectRef idx="2">
-            <a:schemeClr val="accent1"/>
-          </a:effectRef>
-          <a:fontRef idx="minor">
-            <a:schemeClr val="lt1"/>
-          </a:fontRef>
-        </p:style>
-        <p:txBody>
-          <a:bodyPr rtlCol="0" anchor="ctr"/>
-          <a:lstStyle/>
-          <a:p>
-            <a:pPr algn="ctr"/>
-          </a:p>
-        </p:txBody>
-      </p:sp>
-      <p:sp>
-        <p:nvSpPr>
-          <p:cNvPr id="11" name="TextBox 10"/>
-          <p:cNvSpPr txBox="1"/>
-          <p:nvPr/>
-        </p:nvSpPr>
-        <p:spPr>
-          <a:xfrm>
-            <a:off x="3474720" y="2532888"/>
-            <a:ext cx="2240280" cy="502920"/>
-          </a:xfrm>
-          <a:prstGeom prst="rect">
-            <a:avLst/>
-          </a:prstGeom>
-          <a:noFill/>
-        </p:spPr>
-        <p:txBody>
-          <a:bodyPr wrap="square" anchor="t">
-            <a:spAutoFit/>
-          </a:bodyPr>
-          <a:lstStyle/>
-          <a:p>
-            <a:pPr algn="l"/>
-            <a:r>
-              <a:rPr sz="1200" b="1">
-                <a:solidFill>
-                  <a:srgbClr val="9EB0AC"/>
-                </a:solidFill>
-                <a:latin typeface="Segoe UI"/>
-              </a:rPr>
-              <a:t>Automation, no governance</a:t>
-            </a:r>
-          </a:p>
-        </p:txBody>
-      </p:sp>
-      <p:sp>
-        <p:nvSpPr>
-          <p:cNvPr id="12" name="TextBox 11"/>
-          <p:cNvSpPr txBox="1"/>
-          <p:nvPr/>
-        </p:nvSpPr>
-        <p:spPr>
-          <a:xfrm>
-            <a:off x="3474720" y="3108960"/>
-            <a:ext cx="2240280" cy="1097280"/>
-          </a:xfrm>
-          <a:prstGeom prst="rect">
-            <a:avLst/>
-          </a:prstGeom>
-          <a:noFill/>
-        </p:spPr>
-        <p:txBody>
-          <a:bodyPr wrap="square" anchor="t">
-            <a:spAutoFit/>
-          </a:bodyPr>
-          <a:lstStyle/>
-          <a:p>
-            <a:pPr algn="l"/>
-            <a:r>
-              <a:rPr sz="1100" b="0">
-                <a:solidFill>
-                  <a:srgbClr val="9EB0AC"/>
-                </a:solidFill>
-                <a:latin typeface="Segoe UI"/>
-              </a:rPr>
-              <a:t>Fast — but blind and risky</a:t>
-            </a:r>
-          </a:p>
-        </p:txBody>
-      </p:sp>
-      <p:sp>
-        <p:nvSpPr>
-          <p:cNvPr id="13" name="Rounded Rectangle 12"/>
-          <p:cNvSpPr/>
-          <p:nvPr/>
-        </p:nvSpPr>
-        <p:spPr>
-          <a:xfrm>
-            <a:off x="6025896" y="2331720"/>
-            <a:ext cx="2514600" cy="2148840"/>
-          </a:xfrm>
-          <a:prstGeom prst="roundRect">
-            <a:avLst/>
-          </a:prstGeom>
-          <a:solidFill>
-            <a:srgbClr val="141917"/>
-          </a:solidFill>
-          <a:ln w="9525">
-            <a:solidFill>
-              <a:srgbClr val="273A38"/>
-            </a:solidFill>
-          </a:ln>
-        </p:spPr>
-        <p:style>
-          <a:lnRef idx="1">
-            <a:schemeClr val="accent1"/>
-          </a:lnRef>
-          <a:fillRef idx="3">
-            <a:schemeClr val="accent1"/>
-          </a:fillRef>
-          <a:effectRef idx="2">
-            <a:schemeClr val="accent1"/>
-          </a:effectRef>
-          <a:fontRef idx="minor">
-            <a:schemeClr val="lt1"/>
-          </a:fontRef>
-        </p:style>
-        <p:txBody>
-          <a:bodyPr rtlCol="0" anchor="ctr"/>
-          <a:lstStyle/>
-          <a:p>
-            <a:pPr algn="ctr"/>
-          </a:p>
-        </p:txBody>
-      </p:sp>
-      <p:sp>
-        <p:nvSpPr>
-          <p:cNvPr id="14" name="TextBox 13"/>
-          <p:cNvSpPr txBox="1"/>
-          <p:nvPr/>
-        </p:nvSpPr>
-        <p:spPr>
-          <a:xfrm>
-            <a:off x="6190488" y="2532888"/>
-            <a:ext cx="2240280" cy="502920"/>
-          </a:xfrm>
-          <a:prstGeom prst="rect">
-            <a:avLst/>
-          </a:prstGeom>
-          <a:noFill/>
-        </p:spPr>
-        <p:txBody>
-          <a:bodyPr wrap="square" anchor="t">
-            <a:spAutoFit/>
-          </a:bodyPr>
-          <a:lstStyle/>
-          <a:p>
-            <a:pPr algn="l"/>
-            <a:r>
-              <a:rPr sz="1200" b="1">
+              <a:rPr sz="1300" b="1">
                 <a:solidFill>
                   <a:srgbClr val="43C2A9"/>
                 </a:solidFill>
                 <a:latin typeface="Segoe UI"/>
               </a:rPr>
-              <a:t>Salanor model</a:t>
-            </a:r>
-          </a:p>
-        </p:txBody>
-      </p:sp>
-      <p:sp>
-        <p:nvSpPr>
-          <p:cNvPr id="15" name="TextBox 14"/>
-          <p:cNvSpPr txBox="1"/>
-          <p:nvPr/>
-        </p:nvSpPr>
-        <p:spPr>
-          <a:xfrm>
-            <a:off x="6190488" y="3108960"/>
-            <a:ext cx="2240280" cy="1097280"/>
-          </a:xfrm>
-          <a:prstGeom prst="rect">
-            <a:avLst/>
-          </a:prstGeom>
-          <a:noFill/>
-        </p:spPr>
-        <p:txBody>
-          <a:bodyPr wrap="square" anchor="t">
-            <a:spAutoFit/>
-          </a:bodyPr>
-          <a:lstStyle/>
-          <a:p>
-            <a:pPr algn="l"/>
-            <a:r>
-              <a:rPr sz="1100" b="0">
-                <a:solidFill>
-                  <a:srgbClr val="9EB0AC"/>
-                </a:solidFill>
-                <a:latin typeface="Segoe UI"/>
-              </a:rPr>
-              <a:t>Implement workflow + Aegis: fast and provable</a:t>
+              <a:t>Regulators and boards do not ask:</a:t>
+            </a:r>
+            <a:br/>
+            <a:r>
+              <a:t>“Did the robot run?”</a:t>
+            </a:r>
+            <a:br/>
+            <a:br/>
+            <a:r>
+              <a:t>They ask:</a:t>
+            </a:r>
+            <a:br/>
+            <a:r>
+              <a:t>“Who was responsible,</a:t>
+            </a:r>
+            <a:br/>
+            <a:r>
+              <a:t>and can you prove it?”</a:t>
             </a:r>
           </a:p>
         </p:txBody>
@@ -6092,7 +5941,7 @@
                 </a:solidFill>
                 <a:latin typeface="Segoe UI"/>
               </a:rPr>
-              <a:t>ACT 3 · SALANOR</a:t>
+              <a:t>YOU NEED BOTH</a:t>
             </a:r>
           </a:p>
         </p:txBody>
@@ -6127,7 +5976,7 @@
                 </a:solidFill>
                 <a:latin typeface="Segoe UI"/>
               </a:rPr>
-              <a:t>Implementation with governance built in</a:t>
+              <a:t>Fast operations and provable control</a:t>
             </a:r>
           </a:p>
         </p:txBody>
@@ -6177,72 +6026,46 @@
       </p:sp>
       <p:sp>
         <p:nvSpPr>
-          <p:cNvPr id="7" name="TextBox 6"/>
-          <p:cNvSpPr txBox="1"/>
-          <p:nvPr/>
-        </p:nvSpPr>
-        <p:spPr>
-          <a:xfrm>
-            <a:off x="594360" y="2148840"/>
-            <a:ext cx="7955279" cy="2286000"/>
-          </a:xfrm>
-          <a:prstGeom prst="rect">
-            <a:avLst/>
-          </a:prstGeom>
-          <a:noFill/>
-        </p:spPr>
-        <p:txBody>
-          <a:bodyPr wrap="square">
-            <a:spAutoFit/>
-          </a:bodyPr>
-          <a:lstStyle/>
-          <a:p>
-            <a:pPr>
-              <a:spcAft>
-                <a:spcPts val="600"/>
-              </a:spcAft>
-            </a:pPr>
-            <a:r>
-              <a:rPr sz="1300">
-                <a:solidFill>
-                  <a:srgbClr val="E8EDE9"/>
-                </a:solidFill>
-                <a:latin typeface="Segoe UI"/>
-              </a:rPr>
-              <a:t>Design the priority workflow with ops, risk, and IT</a:t>
-            </a:r>
-          </a:p>
-          <a:p>
-            <a:pPr>
-              <a:spcAft>
-                <a:spcPts val="600"/>
-              </a:spcAft>
-            </a:pPr>
-            <a:r>
-              <a:rPr sz="1300">
-                <a:solidFill>
-                  <a:srgbClr val="E8EDE9"/>
-                </a:solidFill>
-                <a:latin typeface="Segoe UI"/>
-              </a:rPr>
-              <a:t>Implement automation on your existing stack — no core replacement</a:t>
-            </a:r>
-          </a:p>
-          <a:p>
-            <a:pPr>
-              <a:spcAft>
-                <a:spcPts val="600"/>
-              </a:spcAft>
-            </a:pPr>
-            <a:r>
-              <a:rPr sz="1300">
-                <a:solidFill>
-                  <a:srgbClr val="E8EDE9"/>
-                </a:solidFill>
-                <a:latin typeface="Segoe UI"/>
-              </a:rPr>
-              <a:t>Include Aegis from day one: rules, approvals, signed traces, audit exports</a:t>
-            </a:r>
+          <p:cNvPr id="7" name="Rounded Rectangle 6"/>
+          <p:cNvSpPr/>
+          <p:nvPr/>
+        </p:nvSpPr>
+        <p:spPr>
+          <a:xfrm>
+            <a:off x="594360" y="2331720"/>
+            <a:ext cx="2514600" cy="2148840"/>
+          </a:xfrm>
+          <a:prstGeom prst="roundRect">
+            <a:avLst/>
+          </a:prstGeom>
+          <a:solidFill>
+            <a:srgbClr val="141917"/>
+          </a:solidFill>
+          <a:ln w="9525">
+            <a:solidFill>
+              <a:srgbClr val="273A38"/>
+            </a:solidFill>
+          </a:ln>
+        </p:spPr>
+        <p:style>
+          <a:lnRef idx="1">
+            <a:schemeClr val="accent1"/>
+          </a:lnRef>
+          <a:fillRef idx="3">
+            <a:schemeClr val="accent1"/>
+          </a:fillRef>
+          <a:effectRef idx="2">
+            <a:schemeClr val="accent1"/>
+          </a:effectRef>
+          <a:fontRef idx="minor">
+            <a:schemeClr val="lt1"/>
+          </a:fontRef>
+        </p:style>
+        <p:txBody>
+          <a:bodyPr rtlCol="0" anchor="ctr"/>
+          <a:lstStyle/>
+          <a:p>
+            <a:pPr algn="ctr"/>
           </a:p>
         </p:txBody>
       </p:sp>
@@ -6254,8 +6077,8 @@
         </p:nvSpPr>
         <p:spPr>
           <a:xfrm>
-            <a:off x="594360" y="4709160"/>
-            <a:ext cx="7955279" cy="502920"/>
+            <a:off x="758952" y="2532888"/>
+            <a:ext cx="2240280" cy="502920"/>
           </a:xfrm>
           <a:prstGeom prst="rect">
             <a:avLst/>
@@ -6270,13 +6093,278 @@
           <a:p>
             <a:pPr algn="l"/>
             <a:r>
-              <a:rPr sz="1400" b="1">
+              <a:rPr sz="1200" b="1">
+                <a:solidFill>
+                  <a:srgbClr val="9EB0AC"/>
+                </a:solidFill>
+                <a:latin typeface="Segoe UI"/>
+              </a:rPr>
+              <a:t>Manual only</a:t>
+            </a:r>
+          </a:p>
+        </p:txBody>
+      </p:sp>
+      <p:sp>
+        <p:nvSpPr>
+          <p:cNvPr id="9" name="TextBox 8"/>
+          <p:cNvSpPr txBox="1"/>
+          <p:nvPr/>
+        </p:nvSpPr>
+        <p:spPr>
+          <a:xfrm>
+            <a:off x="758952" y="3108960"/>
+            <a:ext cx="2240280" cy="1097280"/>
+          </a:xfrm>
+          <a:prstGeom prst="rect">
+            <a:avLst/>
+          </a:prstGeom>
+          <a:noFill/>
+        </p:spPr>
+        <p:txBody>
+          <a:bodyPr wrap="square" anchor="t">
+            <a:spAutoFit/>
+          </a:bodyPr>
+          <a:lstStyle/>
+          <a:p>
+            <a:pPr algn="l"/>
+            <a:r>
+              <a:rPr sz="1100" b="0">
+                <a:solidFill>
+                  <a:srgbClr val="9EB0AC"/>
+                </a:solidFill>
+                <a:latin typeface="Segoe UI"/>
+              </a:rPr>
+              <a:t>Slow, inconsistent, hard to scale</a:t>
+            </a:r>
+          </a:p>
+        </p:txBody>
+      </p:sp>
+      <p:sp>
+        <p:nvSpPr>
+          <p:cNvPr id="10" name="Rounded Rectangle 9"/>
+          <p:cNvSpPr/>
+          <p:nvPr/>
+        </p:nvSpPr>
+        <p:spPr>
+          <a:xfrm>
+            <a:off x="3310128" y="2331720"/>
+            <a:ext cx="2514600" cy="2148840"/>
+          </a:xfrm>
+          <a:prstGeom prst="roundRect">
+            <a:avLst/>
+          </a:prstGeom>
+          <a:solidFill>
+            <a:srgbClr val="141917"/>
+          </a:solidFill>
+          <a:ln w="9525">
+            <a:solidFill>
+              <a:srgbClr val="273A38"/>
+            </a:solidFill>
+          </a:ln>
+        </p:spPr>
+        <p:style>
+          <a:lnRef idx="1">
+            <a:schemeClr val="accent1"/>
+          </a:lnRef>
+          <a:fillRef idx="3">
+            <a:schemeClr val="accent1"/>
+          </a:fillRef>
+          <a:effectRef idx="2">
+            <a:schemeClr val="accent1"/>
+          </a:effectRef>
+          <a:fontRef idx="minor">
+            <a:schemeClr val="lt1"/>
+          </a:fontRef>
+        </p:style>
+        <p:txBody>
+          <a:bodyPr rtlCol="0" anchor="ctr"/>
+          <a:lstStyle/>
+          <a:p>
+            <a:pPr algn="ctr"/>
+          </a:p>
+        </p:txBody>
+      </p:sp>
+      <p:sp>
+        <p:nvSpPr>
+          <p:cNvPr id="11" name="TextBox 10"/>
+          <p:cNvSpPr txBox="1"/>
+          <p:nvPr/>
+        </p:nvSpPr>
+        <p:spPr>
+          <a:xfrm>
+            <a:off x="3474720" y="2532888"/>
+            <a:ext cx="2240280" cy="502920"/>
+          </a:xfrm>
+          <a:prstGeom prst="rect">
+            <a:avLst/>
+          </a:prstGeom>
+          <a:noFill/>
+        </p:spPr>
+        <p:txBody>
+          <a:bodyPr wrap="square" anchor="t">
+            <a:spAutoFit/>
+          </a:bodyPr>
+          <a:lstStyle/>
+          <a:p>
+            <a:pPr algn="l"/>
+            <a:r>
+              <a:rPr sz="1200" b="1">
+                <a:solidFill>
+                  <a:srgbClr val="9EB0AC"/>
+                </a:solidFill>
+                <a:latin typeface="Segoe UI"/>
+              </a:rPr>
+              <a:t>Automation, no governance</a:t>
+            </a:r>
+          </a:p>
+        </p:txBody>
+      </p:sp>
+      <p:sp>
+        <p:nvSpPr>
+          <p:cNvPr id="12" name="TextBox 11"/>
+          <p:cNvSpPr txBox="1"/>
+          <p:nvPr/>
+        </p:nvSpPr>
+        <p:spPr>
+          <a:xfrm>
+            <a:off x="3474720" y="3108960"/>
+            <a:ext cx="2240280" cy="1097280"/>
+          </a:xfrm>
+          <a:prstGeom prst="rect">
+            <a:avLst/>
+          </a:prstGeom>
+          <a:noFill/>
+        </p:spPr>
+        <p:txBody>
+          <a:bodyPr wrap="square" anchor="t">
+            <a:spAutoFit/>
+          </a:bodyPr>
+          <a:lstStyle/>
+          <a:p>
+            <a:pPr algn="l"/>
+            <a:r>
+              <a:rPr sz="1100" b="0">
+                <a:solidFill>
+                  <a:srgbClr val="9EB0AC"/>
+                </a:solidFill>
+                <a:latin typeface="Segoe UI"/>
+              </a:rPr>
+              <a:t>Fast, but blind and risky</a:t>
+            </a:r>
+          </a:p>
+        </p:txBody>
+      </p:sp>
+      <p:sp>
+        <p:nvSpPr>
+          <p:cNvPr id="13" name="Rounded Rectangle 12"/>
+          <p:cNvSpPr/>
+          <p:nvPr/>
+        </p:nvSpPr>
+        <p:spPr>
+          <a:xfrm>
+            <a:off x="6025896" y="2331720"/>
+            <a:ext cx="2514600" cy="2148840"/>
+          </a:xfrm>
+          <a:prstGeom prst="roundRect">
+            <a:avLst/>
+          </a:prstGeom>
+          <a:solidFill>
+            <a:srgbClr val="141917"/>
+          </a:solidFill>
+          <a:ln w="9525">
+            <a:solidFill>
+              <a:srgbClr val="273A38"/>
+            </a:solidFill>
+          </a:ln>
+        </p:spPr>
+        <p:style>
+          <a:lnRef idx="1">
+            <a:schemeClr val="accent1"/>
+          </a:lnRef>
+          <a:fillRef idx="3">
+            <a:schemeClr val="accent1"/>
+          </a:fillRef>
+          <a:effectRef idx="2">
+            <a:schemeClr val="accent1"/>
+          </a:effectRef>
+          <a:fontRef idx="minor">
+            <a:schemeClr val="lt1"/>
+          </a:fontRef>
+        </p:style>
+        <p:txBody>
+          <a:bodyPr rtlCol="0" anchor="ctr"/>
+          <a:lstStyle/>
+          <a:p>
+            <a:pPr algn="ctr"/>
+          </a:p>
+        </p:txBody>
+      </p:sp>
+      <p:sp>
+        <p:nvSpPr>
+          <p:cNvPr id="14" name="TextBox 13"/>
+          <p:cNvSpPr txBox="1"/>
+          <p:nvPr/>
+        </p:nvSpPr>
+        <p:spPr>
+          <a:xfrm>
+            <a:off x="6190488" y="2532888"/>
+            <a:ext cx="2240280" cy="502920"/>
+          </a:xfrm>
+          <a:prstGeom prst="rect">
+            <a:avLst/>
+          </a:prstGeom>
+          <a:noFill/>
+        </p:spPr>
+        <p:txBody>
+          <a:bodyPr wrap="square" anchor="t">
+            <a:spAutoFit/>
+          </a:bodyPr>
+          <a:lstStyle/>
+          <a:p>
+            <a:pPr algn="l"/>
+            <a:r>
+              <a:rPr sz="1200" b="1">
                 <a:solidFill>
                   <a:srgbClr val="43C2A9"/>
                 </a:solidFill>
                 <a:latin typeface="Segoe UI"/>
               </a:rPr>
-              <a:t>We build the automation you need. Aegis is the layer that makes it safe to scale.</a:t>
+              <a:t>Salanor model</a:t>
+            </a:r>
+          </a:p>
+        </p:txBody>
+      </p:sp>
+      <p:sp>
+        <p:nvSpPr>
+          <p:cNvPr id="15" name="TextBox 14"/>
+          <p:cNvSpPr txBox="1"/>
+          <p:nvPr/>
+        </p:nvSpPr>
+        <p:spPr>
+          <a:xfrm>
+            <a:off x="6190488" y="3108960"/>
+            <a:ext cx="2240280" cy="1097280"/>
+          </a:xfrm>
+          <a:prstGeom prst="rect">
+            <a:avLst/>
+          </a:prstGeom>
+          <a:noFill/>
+        </p:spPr>
+        <p:txBody>
+          <a:bodyPr wrap="square" anchor="t">
+            <a:spAutoFit/>
+          </a:bodyPr>
+          <a:lstStyle/>
+          <a:p>
+            <a:pPr algn="l"/>
+            <a:r>
+              <a:rPr sz="1100" b="0">
+                <a:solidFill>
+                  <a:srgbClr val="9EB0AC"/>
+                </a:solidFill>
+                <a:latin typeface="Segoe UI"/>
+              </a:rPr>
+              <a:t>Implement workflow + Aegis: fast and provable</a:t>
             </a:r>
           </a:p>
         </p:txBody>
@@ -6396,7 +6484,7 @@
                 </a:solidFill>
                 <a:latin typeface="Segoe UI"/>
               </a:rPr>
-              <a:t>WHAT AEGIS IS</a:t>
+              <a:t>ACT 3 · SALANOR</a:t>
             </a:r>
           </a:p>
         </p:txBody>
@@ -6431,7 +6519,7 @@
                 </a:solidFill>
                 <a:latin typeface="Segoe UI"/>
               </a:rPr>
-              <a:t>Control and proof before a sensitive action executes</a:t>
+              <a:t>Implementation with governance built in</a:t>
             </a:r>
           </a:p>
         </p:txBody>
@@ -6488,7 +6576,7 @@
         <p:spPr>
           <a:xfrm>
             <a:off x="594360" y="2148840"/>
-            <a:ext cx="4114800" cy="2560320"/>
+            <a:ext cx="7955279" cy="2286000"/>
           </a:xfrm>
           <a:prstGeom prst="rect">
             <a:avLst/>
@@ -6507,13 +6595,13 @@
               </a:spcAft>
             </a:pPr>
             <a:r>
-              <a:rPr sz="1200">
+              <a:rPr sz="1300">
                 <a:solidFill>
                   <a:srgbClr val="E8EDE9"/>
                 </a:solidFill>
                 <a:latin typeface="Segoe UI"/>
               </a:rPr>
-              <a:t>Rule evaluates → allow, deny, or require approval</a:t>
+              <a:t>Design the priority workflow with ops, risk, and IT</a:t>
             </a:r>
           </a:p>
           <a:p>
@@ -6523,13 +6611,13 @@
               </a:spcAft>
             </a:pPr>
             <a:r>
-              <a:rPr sz="1200">
+              <a:rPr sz="1300">
                 <a:solidFill>
                   <a:srgbClr val="E8EDE9"/>
                 </a:solidFill>
                 <a:latin typeface="Segoe UI"/>
               </a:rPr>
-              <a:t>Named human approves or refuses when required</a:t>
+              <a:t>Implement automation on your existing stack — no core replacement</a:t>
             </a:r>
           </a:p>
           <a:p>
@@ -6539,88 +6627,27 @@
               </a:spcAft>
             </a:pPr>
             <a:r>
-              <a:rPr sz="1200">
+              <a:rPr sz="1300">
                 <a:solidFill>
                   <a:srgbClr val="E8EDE9"/>
                 </a:solidFill>
                 <a:latin typeface="Segoe UI"/>
               </a:rPr>
-              <a:t>Action proceeds only after the gate clears</a:t>
-            </a:r>
-          </a:p>
-          <a:p>
-            <a:pPr>
-              <a:spcAft>
-                <a:spcPts val="600"/>
-              </a:spcAft>
-            </a:pPr>
-            <a:r>
-              <a:rPr sz="1200">
-                <a:solidFill>
-                  <a:srgbClr val="E8EDE9"/>
-                </a:solidFill>
-                <a:latin typeface="Segoe UI"/>
-              </a:rPr>
-              <a:t>Every step in a signed, append-only register</a:t>
-            </a:r>
-          </a:p>
-        </p:txBody>
-      </p:sp>
-      <p:sp>
-        <p:nvSpPr>
-          <p:cNvPr id="8" name="Rounded Rectangle 7"/>
-          <p:cNvSpPr/>
-          <p:nvPr/>
-        </p:nvSpPr>
-        <p:spPr>
-          <a:xfrm>
-            <a:off x="4709160" y="2148840"/>
-            <a:ext cx="3611880" cy="2560320"/>
-          </a:xfrm>
-          <a:prstGeom prst="roundRect">
-            <a:avLst/>
-          </a:prstGeom>
-          <a:solidFill>
-            <a:srgbClr val="141917"/>
-          </a:solidFill>
-          <a:ln w="9525">
-            <a:solidFill>
-              <a:srgbClr val="273A38"/>
-            </a:solidFill>
-          </a:ln>
-        </p:spPr>
-        <p:style>
-          <a:lnRef idx="1">
-            <a:schemeClr val="accent1"/>
-          </a:lnRef>
-          <a:fillRef idx="3">
-            <a:schemeClr val="accent1"/>
-          </a:fillRef>
-          <a:effectRef idx="2">
-            <a:schemeClr val="accent1"/>
-          </a:effectRef>
-          <a:fontRef idx="minor">
-            <a:schemeClr val="lt1"/>
-          </a:fontRef>
-        </p:style>
-        <p:txBody>
-          <a:bodyPr rtlCol="0" anchor="ctr"/>
-          <a:lstStyle/>
-          <a:p>
-            <a:pPr algn="ctr"/>
-          </a:p>
-        </p:txBody>
-      </p:sp>
-      <p:sp>
-        <p:nvSpPr>
-          <p:cNvPr id="9" name="TextBox 8"/>
-          <p:cNvSpPr txBox="1"/>
-          <p:nvPr/>
-        </p:nvSpPr>
-        <p:spPr>
-          <a:xfrm>
-            <a:off x="4892040" y="2331720"/>
-            <a:ext cx="3200400" cy="320040"/>
+              <a:t>Include Aegis from day one: rules, approvals, signed traces, audit exports</a:t>
+            </a:r>
+          </a:p>
+        </p:txBody>
+      </p:sp>
+      <p:sp>
+        <p:nvSpPr>
+          <p:cNvPr id="8" name="TextBox 7"/>
+          <p:cNvSpPr txBox="1"/>
+          <p:nvPr/>
+        </p:nvSpPr>
+        <p:spPr>
+          <a:xfrm>
+            <a:off x="594360" y="4709160"/>
+            <a:ext cx="7955279" cy="502920"/>
           </a:xfrm>
           <a:prstGeom prst="rect">
             <a:avLst/>
@@ -6635,84 +6662,13 @@
           <a:p>
             <a:pPr algn="l"/>
             <a:r>
-              <a:rPr sz="1200" b="1">
+              <a:rPr sz="1400" b="1">
                 <a:solidFill>
                   <a:srgbClr val="43C2A9"/>
                 </a:solidFill>
                 <a:latin typeface="Segoe UI"/>
               </a:rPr>
-              <a:t>Aegis is not</a:t>
-            </a:r>
-          </a:p>
-        </p:txBody>
-      </p:sp>
-      <p:sp>
-        <p:nvSpPr>
-          <p:cNvPr id="10" name="TextBox 9"/>
-          <p:cNvSpPr txBox="1"/>
-          <p:nvPr/>
-        </p:nvSpPr>
-        <p:spPr>
-          <a:xfrm>
-            <a:off x="4892040" y="2697480"/>
-            <a:ext cx="3200400" cy="1828800"/>
-          </a:xfrm>
-          <a:prstGeom prst="rect">
-            <a:avLst/>
-          </a:prstGeom>
-          <a:noFill/>
-        </p:spPr>
-        <p:txBody>
-          <a:bodyPr wrap="square">
-            <a:spAutoFit/>
-          </a:bodyPr>
-          <a:lstStyle/>
-          <a:p>
-            <a:pPr>
-              <a:spcAft>
-                <a:spcPts val="600"/>
-              </a:spcAft>
-            </a:pPr>
-            <a:r>
-              <a:rPr sz="1100">
-                <a:solidFill>
-                  <a:srgbClr val="9EB0AC"/>
-                </a:solidFill>
-                <a:latin typeface="Segoe UI"/>
-              </a:rPr>
-              <a:t>Core banking or claims platform</a:t>
-            </a:r>
-          </a:p>
-          <a:p>
-            <a:pPr>
-              <a:spcAft>
-                <a:spcPts val="600"/>
-              </a:spcAft>
-            </a:pPr>
-            <a:r>
-              <a:rPr sz="1100">
-                <a:solidFill>
-                  <a:srgbClr val="9EB0AC"/>
-                </a:solidFill>
-                <a:latin typeface="Segoe UI"/>
-              </a:rPr>
-              <a:t>SIEM or log aggregator</a:t>
-            </a:r>
-          </a:p>
-          <a:p>
-            <a:pPr>
-              <a:spcAft>
-                <a:spcPts val="600"/>
-              </a:spcAft>
-            </a:pPr>
-            <a:r>
-              <a:rPr sz="1100">
-                <a:solidFill>
-                  <a:srgbClr val="9EB0AC"/>
-                </a:solidFill>
-                <a:latin typeface="Segoe UI"/>
-              </a:rPr>
-              <a:t>Replacement for compliance</a:t>
+              <a:t>We automate the workflow. Aegis is built in so risk and audit can trust it.</a:t>
             </a:r>
           </a:p>
         </p:txBody>
@@ -6832,7 +6788,7 @@
                 </a:solidFill>
                 <a:latin typeface="Segoe UI"/>
               </a:rPr>
-              <a:t>HOW IT WORKS</a:t>
+              <a:t>WHAT AEGIS IS</a:t>
             </a:r>
           </a:p>
         </p:txBody>
@@ -6867,7 +6823,7 @@
                 </a:solidFill>
                 <a:latin typeface="Segoe UI"/>
               </a:rPr>
-              <a:t>Four steps, one chain of proof</a:t>
+              <a:t>Control and proof before a sensitive action executes</a:t>
             </a:r>
           </a:p>
         </p:txBody>
@@ -6917,14 +6873,101 @@
       </p:sp>
       <p:sp>
         <p:nvSpPr>
-          <p:cNvPr id="7" name="Rounded Rectangle 6"/>
+          <p:cNvPr id="7" name="TextBox 6"/>
+          <p:cNvSpPr txBox="1"/>
+          <p:nvPr/>
+        </p:nvSpPr>
+        <p:spPr>
+          <a:xfrm>
+            <a:off x="594360" y="2148840"/>
+            <a:ext cx="4114800" cy="2560320"/>
+          </a:xfrm>
+          <a:prstGeom prst="rect">
+            <a:avLst/>
+          </a:prstGeom>
+          <a:noFill/>
+        </p:spPr>
+        <p:txBody>
+          <a:bodyPr wrap="square">
+            <a:spAutoFit/>
+          </a:bodyPr>
+          <a:lstStyle/>
+          <a:p>
+            <a:pPr>
+              <a:spcAft>
+                <a:spcPts val="600"/>
+              </a:spcAft>
+            </a:pPr>
+            <a:r>
+              <a:rPr sz="1200">
+                <a:solidFill>
+                  <a:srgbClr val="E8EDE9"/>
+                </a:solidFill>
+                <a:latin typeface="Segoe UI"/>
+              </a:rPr>
+              <a:t>Rule evaluates → allow, deny, or require approval</a:t>
+            </a:r>
+          </a:p>
+          <a:p>
+            <a:pPr>
+              <a:spcAft>
+                <a:spcPts val="600"/>
+              </a:spcAft>
+            </a:pPr>
+            <a:r>
+              <a:rPr sz="1200">
+                <a:solidFill>
+                  <a:srgbClr val="E8EDE9"/>
+                </a:solidFill>
+                <a:latin typeface="Segoe UI"/>
+              </a:rPr>
+              <a:t>Named human approves or refuses when required</a:t>
+            </a:r>
+          </a:p>
+          <a:p>
+            <a:pPr>
+              <a:spcAft>
+                <a:spcPts val="600"/>
+              </a:spcAft>
+            </a:pPr>
+            <a:r>
+              <a:rPr sz="1200">
+                <a:solidFill>
+                  <a:srgbClr val="E8EDE9"/>
+                </a:solidFill>
+                <a:latin typeface="Segoe UI"/>
+              </a:rPr>
+              <a:t>Action proceeds only after the gate clears</a:t>
+            </a:r>
+          </a:p>
+          <a:p>
+            <a:pPr>
+              <a:spcAft>
+                <a:spcPts val="600"/>
+              </a:spcAft>
+            </a:pPr>
+            <a:r>
+              <a:rPr sz="1200">
+                <a:solidFill>
+                  <a:srgbClr val="E8EDE9"/>
+                </a:solidFill>
+                <a:latin typeface="Segoe UI"/>
+              </a:rPr>
+              <a:t>Every step in a signed, append-only register</a:t>
+            </a:r>
+          </a:p>
+        </p:txBody>
+      </p:sp>
+      <p:sp>
+        <p:nvSpPr>
+          <p:cNvPr id="8" name="Rounded Rectangle 7"/>
           <p:cNvSpPr/>
           <p:nvPr/>
         </p:nvSpPr>
         <p:spPr>
           <a:xfrm>
-            <a:off x="594360" y="2331720"/>
-            <a:ext cx="1874519" cy="2148840"/>
+            <a:off x="4709160" y="2148840"/>
+            <a:ext cx="3611880" cy="2560320"/>
           </a:xfrm>
           <a:prstGeom prst="roundRect">
             <a:avLst/>
@@ -6962,14 +7005,14 @@
       </p:sp>
       <p:sp>
         <p:nvSpPr>
-          <p:cNvPr id="8" name="TextBox 7"/>
-          <p:cNvSpPr txBox="1"/>
-          <p:nvPr/>
-        </p:nvSpPr>
-        <p:spPr>
-          <a:xfrm>
-            <a:off x="704088" y="2468880"/>
-            <a:ext cx="365760" cy="228600"/>
+          <p:cNvPr id="9" name="TextBox 8"/>
+          <p:cNvSpPr txBox="1"/>
+          <p:nvPr/>
+        </p:nvSpPr>
+        <p:spPr>
+          <a:xfrm>
+            <a:off x="4892040" y="2331720"/>
+            <a:ext cx="3200400" cy="320040"/>
           </a:xfrm>
           <a:prstGeom prst="rect">
             <a:avLst/>
@@ -6984,48 +7027,13 @@
           <a:p>
             <a:pPr algn="l"/>
             <a:r>
-              <a:rPr sz="1100" b="1">
+              <a:rPr sz="1200" b="1">
                 <a:solidFill>
                   <a:srgbClr val="43C2A9"/>
                 </a:solidFill>
                 <a:latin typeface="Segoe UI"/>
               </a:rPr>
-              <a:t>01</a:t>
-            </a:r>
-          </a:p>
-        </p:txBody>
-      </p:sp>
-      <p:sp>
-        <p:nvSpPr>
-          <p:cNvPr id="9" name="TextBox 8"/>
-          <p:cNvSpPr txBox="1"/>
-          <p:nvPr/>
-        </p:nvSpPr>
-        <p:spPr>
-          <a:xfrm>
-            <a:off x="704088" y="2743200"/>
-            <a:ext cx="1691639" cy="320040"/>
-          </a:xfrm>
-          <a:prstGeom prst="rect">
-            <a:avLst/>
-          </a:prstGeom>
-          <a:noFill/>
-        </p:spPr>
-        <p:txBody>
-          <a:bodyPr wrap="square" anchor="t">
-            <a:spAutoFit/>
-          </a:bodyPr>
-          <a:lstStyle/>
-          <a:p>
-            <a:pPr algn="l"/>
-            <a:r>
-              <a:rPr sz="1200" b="1">
-                <a:solidFill>
-                  <a:srgbClr val="E8EDE9"/>
-                </a:solidFill>
-                <a:latin typeface="Segoe UI"/>
-              </a:rPr>
-              <a:t>Connect</a:t>
+              <a:t>Aegis is not</a:t>
             </a:r>
           </a:p>
         </p:txBody>
@@ -7038,479 +7046,65 @@
         </p:nvSpPr>
         <p:spPr>
           <a:xfrm>
-            <a:off x="704088" y="3108960"/>
-            <a:ext cx="1691639" cy="1188720"/>
-          </a:xfrm>
-          <a:prstGeom prst="rect">
-            <a:avLst/>
-          </a:prstGeom>
-          <a:noFill/>
-        </p:spPr>
-        <p:txBody>
-          <a:bodyPr wrap="square" anchor="t">
-            <a:spAutoFit/>
-          </a:bodyPr>
-          <a:lstStyle/>
-          <a:p>
-            <a:pPr algn="l"/>
-            <a:r>
-              <a:rPr sz="1000" b="0">
+            <a:off x="4892040" y="2697480"/>
+            <a:ext cx="3200400" cy="1828800"/>
+          </a:xfrm>
+          <a:prstGeom prst="rect">
+            <a:avLst/>
+          </a:prstGeom>
+          <a:noFill/>
+        </p:spPr>
+        <p:txBody>
+          <a:bodyPr wrap="square">
+            <a:spAutoFit/>
+          </a:bodyPr>
+          <a:lstStyle/>
+          <a:p>
+            <a:pPr>
+              <a:spcAft>
+                <a:spcPts val="600"/>
+              </a:spcAft>
+            </a:pPr>
+            <a:r>
+              <a:rPr sz="1100">
                 <a:solidFill>
                   <a:srgbClr val="9EB0AC"/>
                 </a:solidFill>
                 <a:latin typeface="Segoe UI"/>
               </a:rPr>
-              <a:t>n8n, SDK, or open APS-1 format</a:t>
-            </a:r>
-          </a:p>
-        </p:txBody>
-      </p:sp>
-      <p:sp>
-        <p:nvSpPr>
-          <p:cNvPr id="11" name="Rounded Rectangle 10"/>
-          <p:cNvSpPr/>
-          <p:nvPr/>
-        </p:nvSpPr>
-        <p:spPr>
-          <a:xfrm>
-            <a:off x="2633471" y="2331720"/>
-            <a:ext cx="1874519" cy="2148840"/>
-          </a:xfrm>
-          <a:prstGeom prst="roundRect">
-            <a:avLst/>
-          </a:prstGeom>
-          <a:solidFill>
-            <a:srgbClr val="141917"/>
-          </a:solidFill>
-          <a:ln w="9525">
-            <a:solidFill>
-              <a:srgbClr val="273A38"/>
-            </a:solidFill>
-          </a:ln>
-        </p:spPr>
-        <p:style>
-          <a:lnRef idx="1">
-            <a:schemeClr val="accent1"/>
-          </a:lnRef>
-          <a:fillRef idx="3">
-            <a:schemeClr val="accent1"/>
-          </a:fillRef>
-          <a:effectRef idx="2">
-            <a:schemeClr val="accent1"/>
-          </a:effectRef>
-          <a:fontRef idx="minor">
-            <a:schemeClr val="lt1"/>
-          </a:fontRef>
-        </p:style>
-        <p:txBody>
-          <a:bodyPr rtlCol="0" anchor="ctr"/>
-          <a:lstStyle/>
-          <a:p>
-            <a:pPr algn="ctr"/>
-          </a:p>
-        </p:txBody>
-      </p:sp>
-      <p:sp>
-        <p:nvSpPr>
-          <p:cNvPr id="12" name="TextBox 11"/>
-          <p:cNvSpPr txBox="1"/>
-          <p:nvPr/>
-        </p:nvSpPr>
-        <p:spPr>
-          <a:xfrm>
-            <a:off x="2743199" y="2468880"/>
-            <a:ext cx="365760" cy="228600"/>
-          </a:xfrm>
-          <a:prstGeom prst="rect">
-            <a:avLst/>
-          </a:prstGeom>
-          <a:noFill/>
-        </p:spPr>
-        <p:txBody>
-          <a:bodyPr wrap="square" anchor="t">
-            <a:spAutoFit/>
-          </a:bodyPr>
-          <a:lstStyle/>
-          <a:p>
-            <a:pPr algn="l"/>
-            <a:r>
-              <a:rPr sz="1100" b="1">
-                <a:solidFill>
-                  <a:srgbClr val="43C2A9"/>
-                </a:solidFill>
-                <a:latin typeface="Segoe UI"/>
-              </a:rPr>
-              <a:t>02</a:t>
-            </a:r>
-          </a:p>
-        </p:txBody>
-      </p:sp>
-      <p:sp>
-        <p:nvSpPr>
-          <p:cNvPr id="13" name="TextBox 12"/>
-          <p:cNvSpPr txBox="1"/>
-          <p:nvPr/>
-        </p:nvSpPr>
-        <p:spPr>
-          <a:xfrm>
-            <a:off x="2743199" y="2743200"/>
-            <a:ext cx="1691639" cy="320040"/>
-          </a:xfrm>
-          <a:prstGeom prst="rect">
-            <a:avLst/>
-          </a:prstGeom>
-          <a:noFill/>
-        </p:spPr>
-        <p:txBody>
-          <a:bodyPr wrap="square" anchor="t">
-            <a:spAutoFit/>
-          </a:bodyPr>
-          <a:lstStyle/>
-          <a:p>
-            <a:pPr algn="l"/>
-            <a:r>
-              <a:rPr sz="1200" b="1">
-                <a:solidFill>
-                  <a:srgbClr val="E8EDE9"/>
-                </a:solidFill>
-                <a:latin typeface="Segoe UI"/>
-              </a:rPr>
-              <a:t>Apply rules</a:t>
-            </a:r>
-          </a:p>
-        </p:txBody>
-      </p:sp>
-      <p:sp>
-        <p:nvSpPr>
-          <p:cNvPr id="14" name="TextBox 13"/>
-          <p:cNvSpPr txBox="1"/>
-          <p:nvPr/>
-        </p:nvSpPr>
-        <p:spPr>
-          <a:xfrm>
-            <a:off x="2743199" y="3108960"/>
-            <a:ext cx="1691639" cy="1188720"/>
-          </a:xfrm>
-          <a:prstGeom prst="rect">
-            <a:avLst/>
-          </a:prstGeom>
-          <a:noFill/>
-        </p:spPr>
-        <p:txBody>
-          <a:bodyPr wrap="square" anchor="t">
-            <a:spAutoFit/>
-          </a:bodyPr>
-          <a:lstStyle/>
-          <a:p>
-            <a:pPr algn="l"/>
-            <a:r>
-              <a:rPr sz="1000" b="0">
+              <a:t>Core banking or claims platform</a:t>
+            </a:r>
+          </a:p>
+          <a:p>
+            <a:pPr>
+              <a:spcAft>
+                <a:spcPts val="600"/>
+              </a:spcAft>
+            </a:pPr>
+            <a:r>
+              <a:rPr sz="1100">
                 <a:solidFill>
                   <a:srgbClr val="9EB0AC"/>
                 </a:solidFill>
                 <a:latin typeface="Segoe UI"/>
               </a:rPr>
-              <a:t>Allow, block, or pause for approval</a:t>
-            </a:r>
-          </a:p>
-        </p:txBody>
-      </p:sp>
-      <p:sp>
-        <p:nvSpPr>
-          <p:cNvPr id="15" name="Rounded Rectangle 14"/>
-          <p:cNvSpPr/>
-          <p:nvPr/>
-        </p:nvSpPr>
-        <p:spPr>
-          <a:xfrm>
-            <a:off x="4672582" y="2331720"/>
-            <a:ext cx="1874519" cy="2148840"/>
-          </a:xfrm>
-          <a:prstGeom prst="roundRect">
-            <a:avLst/>
-          </a:prstGeom>
-          <a:solidFill>
-            <a:srgbClr val="141917"/>
-          </a:solidFill>
-          <a:ln w="9525">
-            <a:solidFill>
-              <a:srgbClr val="273A38"/>
-            </a:solidFill>
-          </a:ln>
-        </p:spPr>
-        <p:style>
-          <a:lnRef idx="1">
-            <a:schemeClr val="accent1"/>
-          </a:lnRef>
-          <a:fillRef idx="3">
-            <a:schemeClr val="accent1"/>
-          </a:fillRef>
-          <a:effectRef idx="2">
-            <a:schemeClr val="accent1"/>
-          </a:effectRef>
-          <a:fontRef idx="minor">
-            <a:schemeClr val="lt1"/>
-          </a:fontRef>
-        </p:style>
-        <p:txBody>
-          <a:bodyPr rtlCol="0" anchor="ctr"/>
-          <a:lstStyle/>
-          <a:p>
-            <a:pPr algn="ctr"/>
-          </a:p>
-        </p:txBody>
-      </p:sp>
-      <p:sp>
-        <p:nvSpPr>
-          <p:cNvPr id="16" name="TextBox 15"/>
-          <p:cNvSpPr txBox="1"/>
-          <p:nvPr/>
-        </p:nvSpPr>
-        <p:spPr>
-          <a:xfrm>
-            <a:off x="4782310" y="2468880"/>
-            <a:ext cx="365760" cy="228600"/>
-          </a:xfrm>
-          <a:prstGeom prst="rect">
-            <a:avLst/>
-          </a:prstGeom>
-          <a:noFill/>
-        </p:spPr>
-        <p:txBody>
-          <a:bodyPr wrap="square" anchor="t">
-            <a:spAutoFit/>
-          </a:bodyPr>
-          <a:lstStyle/>
-          <a:p>
-            <a:pPr algn="l"/>
-            <a:r>
-              <a:rPr sz="1100" b="1">
-                <a:solidFill>
-                  <a:srgbClr val="43C2A9"/>
-                </a:solidFill>
-                <a:latin typeface="Segoe UI"/>
-              </a:rPr>
-              <a:t>03</a:t>
-            </a:r>
-          </a:p>
-        </p:txBody>
-      </p:sp>
-      <p:sp>
-        <p:nvSpPr>
-          <p:cNvPr id="17" name="TextBox 16"/>
-          <p:cNvSpPr txBox="1"/>
-          <p:nvPr/>
-        </p:nvSpPr>
-        <p:spPr>
-          <a:xfrm>
-            <a:off x="4782310" y="2743200"/>
-            <a:ext cx="1691639" cy="320040"/>
-          </a:xfrm>
-          <a:prstGeom prst="rect">
-            <a:avLst/>
-          </a:prstGeom>
-          <a:noFill/>
-        </p:spPr>
-        <p:txBody>
-          <a:bodyPr wrap="square" anchor="t">
-            <a:spAutoFit/>
-          </a:bodyPr>
-          <a:lstStyle/>
-          <a:p>
-            <a:pPr algn="l"/>
-            <a:r>
-              <a:rPr sz="1200" b="1">
-                <a:solidFill>
-                  <a:srgbClr val="E8EDE9"/>
-                </a:solidFill>
-                <a:latin typeface="Segoe UI"/>
-              </a:rPr>
-              <a:t>Record &amp; sign</a:t>
-            </a:r>
-          </a:p>
-        </p:txBody>
-      </p:sp>
-      <p:sp>
-        <p:nvSpPr>
-          <p:cNvPr id="18" name="TextBox 17"/>
-          <p:cNvSpPr txBox="1"/>
-          <p:nvPr/>
-        </p:nvSpPr>
-        <p:spPr>
-          <a:xfrm>
-            <a:off x="4782310" y="3108960"/>
-            <a:ext cx="1691639" cy="1188720"/>
-          </a:xfrm>
-          <a:prstGeom prst="rect">
-            <a:avLst/>
-          </a:prstGeom>
-          <a:noFill/>
-        </p:spPr>
-        <p:txBody>
-          <a:bodyPr wrap="square" anchor="t">
-            <a:spAutoFit/>
-          </a:bodyPr>
-          <a:lstStyle/>
-          <a:p>
-            <a:pPr algn="l"/>
-            <a:r>
-              <a:rPr sz="1000" b="0">
+              <a:t>SIEM or log aggregator</a:t>
+            </a:r>
+          </a:p>
+          <a:p>
+            <a:pPr>
+              <a:spcAft>
+                <a:spcPts val="600"/>
+              </a:spcAft>
+            </a:pPr>
+            <a:r>
+              <a:rPr sz="1100">
                 <a:solidFill>
                   <a:srgbClr val="9EB0AC"/>
                 </a:solidFill>
                 <a:latin typeface="Segoe UI"/>
               </a:rPr>
-              <a:t>Append-only ledger, witness batches</a:t>
-            </a:r>
-          </a:p>
-        </p:txBody>
-      </p:sp>
-      <p:sp>
-        <p:nvSpPr>
-          <p:cNvPr id="19" name="Rounded Rectangle 18"/>
-          <p:cNvSpPr/>
-          <p:nvPr/>
-        </p:nvSpPr>
-        <p:spPr>
-          <a:xfrm>
-            <a:off x="6711693" y="2331720"/>
-            <a:ext cx="1874519" cy="2148840"/>
-          </a:xfrm>
-          <a:prstGeom prst="roundRect">
-            <a:avLst/>
-          </a:prstGeom>
-          <a:solidFill>
-            <a:srgbClr val="141917"/>
-          </a:solidFill>
-          <a:ln w="9525">
-            <a:solidFill>
-              <a:srgbClr val="273A38"/>
-            </a:solidFill>
-          </a:ln>
-        </p:spPr>
-        <p:style>
-          <a:lnRef idx="1">
-            <a:schemeClr val="accent1"/>
-          </a:lnRef>
-          <a:fillRef idx="3">
-            <a:schemeClr val="accent1"/>
-          </a:fillRef>
-          <a:effectRef idx="2">
-            <a:schemeClr val="accent1"/>
-          </a:effectRef>
-          <a:fontRef idx="minor">
-            <a:schemeClr val="lt1"/>
-          </a:fontRef>
-        </p:style>
-        <p:txBody>
-          <a:bodyPr rtlCol="0" anchor="ctr"/>
-          <a:lstStyle/>
-          <a:p>
-            <a:pPr algn="ctr"/>
-          </a:p>
-        </p:txBody>
-      </p:sp>
-      <p:sp>
-        <p:nvSpPr>
-          <p:cNvPr id="20" name="TextBox 19"/>
-          <p:cNvSpPr txBox="1"/>
-          <p:nvPr/>
-        </p:nvSpPr>
-        <p:spPr>
-          <a:xfrm>
-            <a:off x="6821421" y="2468880"/>
-            <a:ext cx="365760" cy="228600"/>
-          </a:xfrm>
-          <a:prstGeom prst="rect">
-            <a:avLst/>
-          </a:prstGeom>
-          <a:noFill/>
-        </p:spPr>
-        <p:txBody>
-          <a:bodyPr wrap="square" anchor="t">
-            <a:spAutoFit/>
-          </a:bodyPr>
-          <a:lstStyle/>
-          <a:p>
-            <a:pPr algn="l"/>
-            <a:r>
-              <a:rPr sz="1100" b="1">
-                <a:solidFill>
-                  <a:srgbClr val="43C2A9"/>
-                </a:solidFill>
-                <a:latin typeface="Segoe UI"/>
-              </a:rPr>
-              <a:t>04</a:t>
-            </a:r>
-          </a:p>
-        </p:txBody>
-      </p:sp>
-      <p:sp>
-        <p:nvSpPr>
-          <p:cNvPr id="21" name="TextBox 20"/>
-          <p:cNvSpPr txBox="1"/>
-          <p:nvPr/>
-        </p:nvSpPr>
-        <p:spPr>
-          <a:xfrm>
-            <a:off x="6821421" y="2743200"/>
-            <a:ext cx="1691639" cy="320040"/>
-          </a:xfrm>
-          <a:prstGeom prst="rect">
-            <a:avLst/>
-          </a:prstGeom>
-          <a:noFill/>
-        </p:spPr>
-        <p:txBody>
-          <a:bodyPr wrap="square" anchor="t">
-            <a:spAutoFit/>
-          </a:bodyPr>
-          <a:lstStyle/>
-          <a:p>
-            <a:pPr algn="l"/>
-            <a:r>
-              <a:rPr sz="1200" b="1">
-                <a:solidFill>
-                  <a:srgbClr val="E8EDE9"/>
-                </a:solidFill>
-                <a:latin typeface="Segoe UI"/>
-              </a:rPr>
-              <a:t>Replay &amp; export</a:t>
-            </a:r>
-          </a:p>
-        </p:txBody>
-      </p:sp>
-      <p:sp>
-        <p:nvSpPr>
-          <p:cNvPr id="22" name="TextBox 21"/>
-          <p:cNvSpPr txBox="1"/>
-          <p:nvPr/>
-        </p:nvSpPr>
-        <p:spPr>
-          <a:xfrm>
-            <a:off x="6821421" y="3108960"/>
-            <a:ext cx="1691639" cy="1188720"/>
-          </a:xfrm>
-          <a:prstGeom prst="rect">
-            <a:avLst/>
-          </a:prstGeom>
-          <a:noFill/>
-        </p:spPr>
-        <p:txBody>
-          <a:bodyPr wrap="square" anchor="t">
-            <a:spAutoFit/>
-          </a:bodyPr>
-          <a:lstStyle/>
-          <a:p>
-            <a:pPr algn="l"/>
-            <a:r>
-              <a:rPr sz="1000" b="0">
-                <a:solidFill>
-                  <a:srgbClr val="9EB0AC"/>
-                </a:solidFill>
-                <a:latin typeface="Segoe UI"/>
-              </a:rPr>
-              <a:t>Console, verification, audit bundles</a:t>
+              <a:t>Replacement for compliance</a:t>
             </a:r>
           </a:p>
         </p:txBody>
@@ -7630,7 +7224,7 @@
                 </a:solidFill>
                 <a:latin typeface="Segoe UI"/>
               </a:rPr>
-              <a:t>LIVE DEMO</a:t>
+              <a:t>LIMITS AND RULES PER CLIENT</a:t>
             </a:r>
           </a:p>
         </p:txBody>
@@ -7665,7 +7259,7 @@
                 </a:solidFill>
                 <a:latin typeface="Segoe UI"/>
               </a:rPr>
-              <a:t>Bank scenario: outbound transfer above limit</a:t>
+              <a:t>Honest path: amount rules today, your data model in deployment</a:t>
             </a:r>
           </a:p>
         </p:txBody>
@@ -7722,7 +7316,7 @@
         <p:spPr>
           <a:xfrm>
             <a:off x="594360" y="2148840"/>
-            <a:ext cx="7955279" cy="3063240"/>
+            <a:ext cx="2514600" cy="2880360"/>
           </a:xfrm>
           <a:prstGeom prst="roundRect">
             <a:avLst/>
@@ -7766,8 +7360,8 @@
         </p:nvSpPr>
         <p:spPr>
           <a:xfrm>
-            <a:off x="822960" y="2331720"/>
-            <a:ext cx="7315200" cy="411480"/>
+            <a:off x="731520" y="2286000"/>
+            <a:ext cx="2286000" cy="411480"/>
           </a:xfrm>
           <a:prstGeom prst="rect">
             <a:avLst/>
@@ -7782,13 +7376,13 @@
           <a:p>
             <a:pPr algn="l"/>
             <a:r>
-              <a:rPr sz="1300" b="1">
-                <a:solidFill>
-                  <a:srgbClr val="E8EDE9"/>
-                </a:solidFill>
-                <a:latin typeface="Segoe UI"/>
-              </a:rPr>
-              <a:t>Case: workflow attempts USD 2,500 transfer. Rule: above USD 1,000 requires human approval.</a:t>
+              <a:rPr sz="1100" b="1">
+                <a:solidFill>
+                  <a:srgbClr val="43C2A9"/>
+                </a:solidFill>
+                <a:latin typeface="Segoe UI"/>
+              </a:rPr>
+              <a:t>Today (shipped)</a:t>
             </a:r>
           </a:p>
         </p:txBody>
@@ -7801,8 +7395,8 @@
         </p:nvSpPr>
         <p:spPr>
           <a:xfrm>
-            <a:off x="822960" y="2788920"/>
-            <a:ext cx="7315200" cy="2194560"/>
+            <a:off x="731520" y="2715768"/>
+            <a:ext cx="2286000" cy="2148840"/>
           </a:xfrm>
           <a:prstGeom prst="rect">
             <a:avLst/>
@@ -7821,13 +7415,13 @@
               </a:spcAft>
             </a:pPr>
             <a:r>
-              <a:rPr sz="1200">
-                <a:solidFill>
-                  <a:srgbClr val="E8EDE9"/>
-                </a:solidFill>
-                <a:latin typeface="Segoe UI"/>
-              </a:rPr>
-              <a:t>Without governance → payment goes when workflow runs</a:t>
+              <a:rPr sz="1000">
+                <a:solidFill>
+                  <a:srgbClr val="9EB0AC"/>
+                </a:solidFill>
+                <a:latin typeface="Segoe UI"/>
+              </a:rPr>
+              <a:t>Thresholds by amount and action type</a:t>
             </a:r>
           </a:p>
           <a:p>
@@ -7837,13 +7431,13 @@
               </a:spcAft>
             </a:pPr>
             <a:r>
-              <a:rPr sz="1200">
-                <a:solidFill>
-                  <a:srgbClr val="E8EDE9"/>
-                </a:solidFill>
-                <a:latin typeface="Segoe UI"/>
-              </a:rPr>
-              <a:t>With Aegis → workflow stops; approver sees amount, beneficiary, context</a:t>
+              <a:rPr sz="1000">
+                <a:solidFill>
+                  <a:srgbClr val="9EB0AC"/>
+                </a:solidFill>
+                <a:latin typeface="Segoe UI"/>
+              </a:rPr>
+              <a:t>Full client context for the approver: account, beneficiary, segment</a:t>
             </a:r>
           </a:p>
           <a:p>
@@ -7853,15 +7447,118 @@
               </a:spcAft>
             </a:pPr>
             <a:r>
-              <a:rPr sz="1200">
-                <a:solidFill>
-                  <a:srgbClr val="E8EDE9"/>
-                </a:solidFill>
-                <a:latin typeface="Segoe UI"/>
-              </a:rPr>
-              <a:t>No approval → no payment. Every step recorded and signed.</a:t>
-            </a:r>
-          </a:p>
+              <a:rPr sz="1000">
+                <a:solidFill>
+                  <a:srgbClr val="9EB0AC"/>
+                </a:solidFill>
+                <a:latin typeface="Segoe UI"/>
+              </a:rPr>
+              <a:t>Multiple active policies in parallel</a:t>
+            </a:r>
+          </a:p>
+        </p:txBody>
+      </p:sp>
+      <p:sp>
+        <p:nvSpPr>
+          <p:cNvPr id="10" name="Rounded Rectangle 9"/>
+          <p:cNvSpPr/>
+          <p:nvPr/>
+        </p:nvSpPr>
+        <p:spPr>
+          <a:xfrm>
+            <a:off x="3310128" y="2148840"/>
+            <a:ext cx="2514600" cy="2880360"/>
+          </a:xfrm>
+          <a:prstGeom prst="roundRect">
+            <a:avLst/>
+          </a:prstGeom>
+          <a:solidFill>
+            <a:srgbClr val="141917"/>
+          </a:solidFill>
+          <a:ln w="9525">
+            <a:solidFill>
+              <a:srgbClr val="273A38"/>
+            </a:solidFill>
+          </a:ln>
+        </p:spPr>
+        <p:style>
+          <a:lnRef idx="1">
+            <a:schemeClr val="accent1"/>
+          </a:lnRef>
+          <a:fillRef idx="3">
+            <a:schemeClr val="accent1"/>
+          </a:fillRef>
+          <a:effectRef idx="2">
+            <a:schemeClr val="accent1"/>
+          </a:effectRef>
+          <a:fontRef idx="minor">
+            <a:schemeClr val="lt1"/>
+          </a:fontRef>
+        </p:style>
+        <p:txBody>
+          <a:bodyPr rtlCol="0" anchor="ctr"/>
+          <a:lstStyle/>
+          <a:p>
+            <a:pPr algn="ctr"/>
+          </a:p>
+        </p:txBody>
+      </p:sp>
+      <p:sp>
+        <p:nvSpPr>
+          <p:cNvPr id="11" name="TextBox 10"/>
+          <p:cNvSpPr txBox="1"/>
+          <p:nvPr/>
+        </p:nvSpPr>
+        <p:spPr>
+          <a:xfrm>
+            <a:off x="3447288" y="2286000"/>
+            <a:ext cx="2286000" cy="411480"/>
+          </a:xfrm>
+          <a:prstGeom prst="rect">
+            <a:avLst/>
+          </a:prstGeom>
+          <a:noFill/>
+        </p:spPr>
+        <p:txBody>
+          <a:bodyPr wrap="square" anchor="t">
+            <a:spAutoFit/>
+          </a:bodyPr>
+          <a:lstStyle/>
+          <a:p>
+            <a:pPr algn="l"/>
+            <a:r>
+              <a:rPr sz="1100" b="1">
+                <a:solidFill>
+                  <a:srgbClr val="43C2A9"/>
+                </a:solidFill>
+                <a:latin typeface="Segoe UI"/>
+              </a:rPr>
+              <a:t>Phase 2 (with you)</a:t>
+            </a:r>
+          </a:p>
+        </p:txBody>
+      </p:sp>
+      <p:sp>
+        <p:nvSpPr>
+          <p:cNvPr id="12" name="TextBox 11"/>
+          <p:cNvSpPr txBox="1"/>
+          <p:nvPr/>
+        </p:nvSpPr>
+        <p:spPr>
+          <a:xfrm>
+            <a:off x="3447288" y="2715768"/>
+            <a:ext cx="2286000" cy="2148840"/>
+          </a:xfrm>
+          <a:prstGeom prst="rect">
+            <a:avLst/>
+          </a:prstGeom>
+          <a:noFill/>
+        </p:spPr>
+        <p:txBody>
+          <a:bodyPr wrap="square">
+            <a:spAutoFit/>
+          </a:bodyPr>
+          <a:lstStyle/>
           <a:p>
             <a:pPr>
               <a:spcAft>
@@ -7869,27 +7566,88 @@
               </a:spcAft>
             </a:pPr>
             <a:r>
-              <a:rPr sz="1200">
-                <a:solidFill>
-                  <a:srgbClr val="E8EDE9"/>
-                </a:solidFill>
-                <a:latin typeface="Segoe UI"/>
-              </a:rPr>
-              <a:t>Same pattern for claims, KYC, limit changes.</a:t>
-            </a:r>
-          </a:p>
-        </p:txBody>
-      </p:sp>
-      <p:sp>
-        <p:nvSpPr>
-          <p:cNvPr id="10" name="TextBox 9"/>
-          <p:cNvSpPr txBox="1"/>
-          <p:nvPr/>
-        </p:nvSpPr>
-        <p:spPr>
-          <a:xfrm>
-            <a:off x="594360" y="5486400"/>
-            <a:ext cx="7955279" cy="320040"/>
+              <a:rPr sz="1000">
+                <a:solidFill>
+                  <a:srgbClr val="9EB0AC"/>
+                </a:solidFill>
+                <a:latin typeface="Segoe UI"/>
+              </a:rPr>
+              <a:t>Rules by client segment, account type, beneficiary lists</a:t>
+            </a:r>
+          </a:p>
+          <a:p>
+            <a:pPr>
+              <a:spcAft>
+                <a:spcPts val="600"/>
+              </a:spcAft>
+            </a:pPr>
+            <a:r>
+              <a:rPr sz="1000">
+                <a:solidFill>
+                  <a:srgbClr val="9EB0AC"/>
+                </a:solidFill>
+                <a:latin typeface="Segoe UI"/>
+              </a:rPr>
+              <a:t>Your core banking fields inside the rule condition</a:t>
+            </a:r>
+          </a:p>
+        </p:txBody>
+      </p:sp>
+      <p:sp>
+        <p:nvSpPr>
+          <p:cNvPr id="13" name="Rounded Rectangle 12"/>
+          <p:cNvSpPr/>
+          <p:nvPr/>
+        </p:nvSpPr>
+        <p:spPr>
+          <a:xfrm>
+            <a:off x="6025896" y="2148840"/>
+            <a:ext cx="2514600" cy="2880360"/>
+          </a:xfrm>
+          <a:prstGeom prst="roundRect">
+            <a:avLst/>
+          </a:prstGeom>
+          <a:solidFill>
+            <a:srgbClr val="141917"/>
+          </a:solidFill>
+          <a:ln w="9525">
+            <a:solidFill>
+              <a:srgbClr val="273A38"/>
+            </a:solidFill>
+          </a:ln>
+        </p:spPr>
+        <p:style>
+          <a:lnRef idx="1">
+            <a:schemeClr val="accent1"/>
+          </a:lnRef>
+          <a:fillRef idx="3">
+            <a:schemeClr val="accent1"/>
+          </a:fillRef>
+          <a:effectRef idx="2">
+            <a:schemeClr val="accent1"/>
+          </a:effectRef>
+          <a:fontRef idx="minor">
+            <a:schemeClr val="lt1"/>
+          </a:fontRef>
+        </p:style>
+        <p:txBody>
+          <a:bodyPr rtlCol="0" anchor="ctr"/>
+          <a:lstStyle/>
+          <a:p>
+            <a:pPr algn="ctr"/>
+          </a:p>
+        </p:txBody>
+      </p:sp>
+      <p:sp>
+        <p:nvSpPr>
+          <p:cNvPr id="14" name="TextBox 13"/>
+          <p:cNvSpPr txBox="1"/>
+          <p:nvPr/>
+        </p:nvSpPr>
+        <p:spPr>
+          <a:xfrm>
+            <a:off x="6163056" y="2286000"/>
+            <a:ext cx="2286000" cy="411480"/>
           </a:xfrm>
           <a:prstGeom prst="rect">
             <a:avLst/>
@@ -7904,13 +7662,103 @@
           <a:p>
             <a:pPr algn="l"/>
             <a:r>
+              <a:rPr sz="1100" b="1">
+                <a:solidFill>
+                  <a:srgbClr val="43C2A9"/>
+                </a:solidFill>
+                <a:latin typeface="Segoe UI"/>
+              </a:rPr>
+              <a:t>Phase 3 (optional)</a:t>
+            </a:r>
+          </a:p>
+        </p:txBody>
+      </p:sp>
+      <p:sp>
+        <p:nvSpPr>
+          <p:cNvPr id="15" name="TextBox 14"/>
+          <p:cNvSpPr txBox="1"/>
+          <p:nvPr/>
+        </p:nvSpPr>
+        <p:spPr>
+          <a:xfrm>
+            <a:off x="6163056" y="2715768"/>
+            <a:ext cx="2286000" cy="2148840"/>
+          </a:xfrm>
+          <a:prstGeom prst="rect">
+            <a:avLst/>
+          </a:prstGeom>
+          <a:noFill/>
+        </p:spPr>
+        <p:txBody>
+          <a:bodyPr wrap="square">
+            <a:spAutoFit/>
+          </a:bodyPr>
+          <a:lstStyle/>
+          <a:p>
+            <a:pPr>
+              <a:spcAft>
+                <a:spcPts val="600"/>
+              </a:spcAft>
+            </a:pPr>
+            <a:r>
+              <a:rPr sz="1000">
+                <a:solidFill>
+                  <a:srgbClr val="9EB0AC"/>
+                </a:solidFill>
+                <a:latin typeface="Segoe UI"/>
+              </a:rPr>
+              <a:t>Risk model on your data to recommend limit per client</a:t>
+            </a:r>
+          </a:p>
+          <a:p>
+            <a:pPr>
+              <a:spcAft>
+                <a:spcPts val="600"/>
+              </a:spcAft>
+            </a:pPr>
+            <a:r>
+              <a:rPr sz="1000">
+                <a:solidFill>
+                  <a:srgbClr val="9EB0AC"/>
+                </a:solidFill>
+                <a:latin typeface="Segoe UI"/>
+              </a:rPr>
+              <a:t>Scoring stays with you or is built with your risk team in scoping</a:t>
+            </a:r>
+          </a:p>
+        </p:txBody>
+      </p:sp>
+      <p:sp>
+        <p:nvSpPr>
+          <p:cNvPr id="16" name="TextBox 15"/>
+          <p:cNvSpPr txBox="1"/>
+          <p:nvPr/>
+        </p:nvSpPr>
+        <p:spPr>
+          <a:xfrm>
+            <a:off x="594360" y="5257800"/>
+            <a:ext cx="7955279" cy="685800"/>
+          </a:xfrm>
+          <a:prstGeom prst="rect">
+            <a:avLst/>
+          </a:prstGeom>
+          <a:noFill/>
+        </p:spPr>
+        <p:txBody>
+          <a:bodyPr wrap="square" anchor="t">
+            <a:spAutoFit/>
+          </a:bodyPr>
+          <a:lstStyle/>
+          <a:p>
+            <a:pPr algn="l"/>
+            <a:r>
               <a:rPr sz="1100" b="0">
                 <a:solidFill>
-                  <a:srgbClr val="718582"/>
-                </a:solidFill>
-                <a:latin typeface="Segoe UI"/>
-              </a:rPr>
-              <a:t>Demo: app.salanor.com · Prepare Approvals history before the meeting</a:t>
+                  <a:srgbClr val="9EB0AC"/>
+                </a:solidFill>
+                <a:latin typeface="Segoe UI"/>
+              </a:rPr>
+              <a:t>We provide execution and proof. Per-client limits from your risk model are mapped during deployment with payment and risk teams.</a:t>
             </a:r>
           </a:p>
         </p:txBody>
@@ -8030,7 +7878,7 @@
                 </a:solidFill>
                 <a:latin typeface="Segoe UI"/>
               </a:rPr>
-              <a:t>HUMAN APPROVAL</a:t>
+              <a:t>HOW IT WORKS</a:t>
             </a:r>
           </a:p>
         </p:txBody>
@@ -8065,7 +7913,7 @@
                 </a:solidFill>
                 <a:latin typeface="Segoe UI"/>
               </a:rPr>
-              <a:t>“Proposed by the system” vs “authorized by a person”</a:t>
+              <a:t>Four steps, one chain of proof</a:t>
             </a:r>
           </a:p>
         </p:txBody>
@@ -8115,87 +7963,600 @@
       </p:sp>
       <p:sp>
         <p:nvSpPr>
-          <p:cNvPr id="7" name="TextBox 6"/>
-          <p:cNvSpPr txBox="1"/>
-          <p:nvPr/>
-        </p:nvSpPr>
-        <p:spPr>
-          <a:xfrm>
-            <a:off x="594360" y="2148840"/>
-            <a:ext cx="7955279" cy="2926080"/>
-          </a:xfrm>
-          <a:prstGeom prst="rect">
-            <a:avLst/>
-          </a:prstGeom>
-          <a:noFill/>
-        </p:spPr>
-        <p:txBody>
-          <a:bodyPr wrap="square">
-            <a:spAutoFit/>
-          </a:bodyPr>
-          <a:lstStyle/>
-          <a:p>
-            <a:pPr>
-              <a:spcAft>
-                <a:spcPts val="600"/>
-              </a:spcAft>
-            </a:pPr>
-            <a:r>
-              <a:rPr sz="1300">
+          <p:cNvPr id="7" name="Rounded Rectangle 6"/>
+          <p:cNvSpPr/>
+          <p:nvPr/>
+        </p:nvSpPr>
+        <p:spPr>
+          <a:xfrm>
+            <a:off x="594360" y="2331720"/>
+            <a:ext cx="1874519" cy="2148840"/>
+          </a:xfrm>
+          <a:prstGeom prst="roundRect">
+            <a:avLst/>
+          </a:prstGeom>
+          <a:solidFill>
+            <a:srgbClr val="141917"/>
+          </a:solidFill>
+          <a:ln w="9525">
+            <a:solidFill>
+              <a:srgbClr val="273A38"/>
+            </a:solidFill>
+          </a:ln>
+        </p:spPr>
+        <p:style>
+          <a:lnRef idx="1">
+            <a:schemeClr val="accent1"/>
+          </a:lnRef>
+          <a:fillRef idx="3">
+            <a:schemeClr val="accent1"/>
+          </a:fillRef>
+          <a:effectRef idx="2">
+            <a:schemeClr val="accent1"/>
+          </a:effectRef>
+          <a:fontRef idx="minor">
+            <a:schemeClr val="lt1"/>
+          </a:fontRef>
+        </p:style>
+        <p:txBody>
+          <a:bodyPr rtlCol="0" anchor="ctr"/>
+          <a:lstStyle/>
+          <a:p>
+            <a:pPr algn="ctr"/>
+          </a:p>
+        </p:txBody>
+      </p:sp>
+      <p:sp>
+        <p:nvSpPr>
+          <p:cNvPr id="8" name="TextBox 7"/>
+          <p:cNvSpPr txBox="1"/>
+          <p:nvPr/>
+        </p:nvSpPr>
+        <p:spPr>
+          <a:xfrm>
+            <a:off x="704088" y="2468880"/>
+            <a:ext cx="365760" cy="228600"/>
+          </a:xfrm>
+          <a:prstGeom prst="rect">
+            <a:avLst/>
+          </a:prstGeom>
+          <a:noFill/>
+        </p:spPr>
+        <p:txBody>
+          <a:bodyPr wrap="square" anchor="t">
+            <a:spAutoFit/>
+          </a:bodyPr>
+          <a:lstStyle/>
+          <a:p>
+            <a:pPr algn="l"/>
+            <a:r>
+              <a:rPr sz="1100" b="1">
+                <a:solidFill>
+                  <a:srgbClr val="43C2A9"/>
+                </a:solidFill>
+                <a:latin typeface="Segoe UI"/>
+              </a:rPr>
+              <a:t>01</a:t>
+            </a:r>
+          </a:p>
+        </p:txBody>
+      </p:sp>
+      <p:sp>
+        <p:nvSpPr>
+          <p:cNvPr id="9" name="TextBox 8"/>
+          <p:cNvSpPr txBox="1"/>
+          <p:nvPr/>
+        </p:nvSpPr>
+        <p:spPr>
+          <a:xfrm>
+            <a:off x="704088" y="2743200"/>
+            <a:ext cx="1691639" cy="320040"/>
+          </a:xfrm>
+          <a:prstGeom prst="rect">
+            <a:avLst/>
+          </a:prstGeom>
+          <a:noFill/>
+        </p:spPr>
+        <p:txBody>
+          <a:bodyPr wrap="square" anchor="t">
+            <a:spAutoFit/>
+          </a:bodyPr>
+          <a:lstStyle/>
+          <a:p>
+            <a:pPr algn="l"/>
+            <a:r>
+              <a:rPr sz="1200" b="1">
                 <a:solidFill>
                   <a:srgbClr val="E8EDE9"/>
                 </a:solidFill>
                 <a:latin typeface="Segoe UI"/>
               </a:rPr>
-              <a:t>Alerts via email, Slack, PagerDuty, or SMS</a:t>
-            </a:r>
-          </a:p>
-          <a:p>
-            <a:pPr>
-              <a:spcAft>
-                <a:spcPts val="600"/>
-              </a:spcAft>
-            </a:pPr>
-            <a:r>
-              <a:rPr sz="1300">
+              <a:t>Connect</a:t>
+            </a:r>
+          </a:p>
+        </p:txBody>
+      </p:sp>
+      <p:sp>
+        <p:nvSpPr>
+          <p:cNvPr id="10" name="TextBox 9"/>
+          <p:cNvSpPr txBox="1"/>
+          <p:nvPr/>
+        </p:nvSpPr>
+        <p:spPr>
+          <a:xfrm>
+            <a:off x="704088" y="3108960"/>
+            <a:ext cx="1691639" cy="1188720"/>
+          </a:xfrm>
+          <a:prstGeom prst="rect">
+            <a:avLst/>
+          </a:prstGeom>
+          <a:noFill/>
+        </p:spPr>
+        <p:txBody>
+          <a:bodyPr wrap="square" anchor="t">
+            <a:spAutoFit/>
+          </a:bodyPr>
+          <a:lstStyle/>
+          <a:p>
+            <a:pPr algn="l"/>
+            <a:r>
+              <a:rPr sz="1000" b="0">
+                <a:solidFill>
+                  <a:srgbClr val="9EB0AC"/>
+                </a:solidFill>
+                <a:latin typeface="Segoe UI"/>
+              </a:rPr>
+              <a:t>n8n, SDK, or open APS-1 format</a:t>
+            </a:r>
+          </a:p>
+        </p:txBody>
+      </p:sp>
+      <p:sp>
+        <p:nvSpPr>
+          <p:cNvPr id="11" name="Rounded Rectangle 10"/>
+          <p:cNvSpPr/>
+          <p:nvPr/>
+        </p:nvSpPr>
+        <p:spPr>
+          <a:xfrm>
+            <a:off x="2633471" y="2331720"/>
+            <a:ext cx="1874519" cy="2148840"/>
+          </a:xfrm>
+          <a:prstGeom prst="roundRect">
+            <a:avLst/>
+          </a:prstGeom>
+          <a:solidFill>
+            <a:srgbClr val="141917"/>
+          </a:solidFill>
+          <a:ln w="9525">
+            <a:solidFill>
+              <a:srgbClr val="273A38"/>
+            </a:solidFill>
+          </a:ln>
+        </p:spPr>
+        <p:style>
+          <a:lnRef idx="1">
+            <a:schemeClr val="accent1"/>
+          </a:lnRef>
+          <a:fillRef idx="3">
+            <a:schemeClr val="accent1"/>
+          </a:fillRef>
+          <a:effectRef idx="2">
+            <a:schemeClr val="accent1"/>
+          </a:effectRef>
+          <a:fontRef idx="minor">
+            <a:schemeClr val="lt1"/>
+          </a:fontRef>
+        </p:style>
+        <p:txBody>
+          <a:bodyPr rtlCol="0" anchor="ctr"/>
+          <a:lstStyle/>
+          <a:p>
+            <a:pPr algn="ctr"/>
+          </a:p>
+        </p:txBody>
+      </p:sp>
+      <p:sp>
+        <p:nvSpPr>
+          <p:cNvPr id="12" name="TextBox 11"/>
+          <p:cNvSpPr txBox="1"/>
+          <p:nvPr/>
+        </p:nvSpPr>
+        <p:spPr>
+          <a:xfrm>
+            <a:off x="2743199" y="2468880"/>
+            <a:ext cx="365760" cy="228600"/>
+          </a:xfrm>
+          <a:prstGeom prst="rect">
+            <a:avLst/>
+          </a:prstGeom>
+          <a:noFill/>
+        </p:spPr>
+        <p:txBody>
+          <a:bodyPr wrap="square" anchor="t">
+            <a:spAutoFit/>
+          </a:bodyPr>
+          <a:lstStyle/>
+          <a:p>
+            <a:pPr algn="l"/>
+            <a:r>
+              <a:rPr sz="1100" b="1">
+                <a:solidFill>
+                  <a:srgbClr val="43C2A9"/>
+                </a:solidFill>
+                <a:latin typeface="Segoe UI"/>
+              </a:rPr>
+              <a:t>02</a:t>
+            </a:r>
+          </a:p>
+        </p:txBody>
+      </p:sp>
+      <p:sp>
+        <p:nvSpPr>
+          <p:cNvPr id="13" name="TextBox 12"/>
+          <p:cNvSpPr txBox="1"/>
+          <p:nvPr/>
+        </p:nvSpPr>
+        <p:spPr>
+          <a:xfrm>
+            <a:off x="2743199" y="2743200"/>
+            <a:ext cx="1691639" cy="320040"/>
+          </a:xfrm>
+          <a:prstGeom prst="rect">
+            <a:avLst/>
+          </a:prstGeom>
+          <a:noFill/>
+        </p:spPr>
+        <p:txBody>
+          <a:bodyPr wrap="square" anchor="t">
+            <a:spAutoFit/>
+          </a:bodyPr>
+          <a:lstStyle/>
+          <a:p>
+            <a:pPr algn="l"/>
+            <a:r>
+              <a:rPr sz="1200" b="1">
                 <a:solidFill>
                   <a:srgbClr val="E8EDE9"/>
                 </a:solidFill>
                 <a:latin typeface="Segoe UI"/>
               </a:rPr>
-              <a:t>Named approver, timestamp, one trace</a:t>
-            </a:r>
-          </a:p>
-          <a:p>
-            <a:pPr>
-              <a:spcAft>
-                <a:spcPts val="600"/>
-              </a:spcAft>
-            </a:pPr>
-            <a:r>
-              <a:rPr sz="1300">
+              <a:t>Apply rules</a:t>
+            </a:r>
+          </a:p>
+        </p:txBody>
+      </p:sp>
+      <p:sp>
+        <p:nvSpPr>
+          <p:cNvPr id="14" name="TextBox 13"/>
+          <p:cNvSpPr txBox="1"/>
+          <p:nvPr/>
+        </p:nvSpPr>
+        <p:spPr>
+          <a:xfrm>
+            <a:off x="2743199" y="3108960"/>
+            <a:ext cx="1691639" cy="1188720"/>
+          </a:xfrm>
+          <a:prstGeom prst="rect">
+            <a:avLst/>
+          </a:prstGeom>
+          <a:noFill/>
+        </p:spPr>
+        <p:txBody>
+          <a:bodyPr wrap="square" anchor="t">
+            <a:spAutoFit/>
+          </a:bodyPr>
+          <a:lstStyle/>
+          <a:p>
+            <a:pPr algn="l"/>
+            <a:r>
+              <a:rPr sz="1000" b="0">
+                <a:solidFill>
+                  <a:srgbClr val="9EB0AC"/>
+                </a:solidFill>
+                <a:latin typeface="Segoe UI"/>
+              </a:rPr>
+              <a:t>Allow, block, or pause for approval</a:t>
+            </a:r>
+          </a:p>
+        </p:txBody>
+      </p:sp>
+      <p:sp>
+        <p:nvSpPr>
+          <p:cNvPr id="15" name="Rounded Rectangle 14"/>
+          <p:cNvSpPr/>
+          <p:nvPr/>
+        </p:nvSpPr>
+        <p:spPr>
+          <a:xfrm>
+            <a:off x="4672582" y="2331720"/>
+            <a:ext cx="1874519" cy="2148840"/>
+          </a:xfrm>
+          <a:prstGeom prst="roundRect">
+            <a:avLst/>
+          </a:prstGeom>
+          <a:solidFill>
+            <a:srgbClr val="141917"/>
+          </a:solidFill>
+          <a:ln w="9525">
+            <a:solidFill>
+              <a:srgbClr val="273A38"/>
+            </a:solidFill>
+          </a:ln>
+        </p:spPr>
+        <p:style>
+          <a:lnRef idx="1">
+            <a:schemeClr val="accent1"/>
+          </a:lnRef>
+          <a:fillRef idx="3">
+            <a:schemeClr val="accent1"/>
+          </a:fillRef>
+          <a:effectRef idx="2">
+            <a:schemeClr val="accent1"/>
+          </a:effectRef>
+          <a:fontRef idx="minor">
+            <a:schemeClr val="lt1"/>
+          </a:fontRef>
+        </p:style>
+        <p:txBody>
+          <a:bodyPr rtlCol="0" anchor="ctr"/>
+          <a:lstStyle/>
+          <a:p>
+            <a:pPr algn="ctr"/>
+          </a:p>
+        </p:txBody>
+      </p:sp>
+      <p:sp>
+        <p:nvSpPr>
+          <p:cNvPr id="16" name="TextBox 15"/>
+          <p:cNvSpPr txBox="1"/>
+          <p:nvPr/>
+        </p:nvSpPr>
+        <p:spPr>
+          <a:xfrm>
+            <a:off x="4782310" y="2468880"/>
+            <a:ext cx="365760" cy="228600"/>
+          </a:xfrm>
+          <a:prstGeom prst="rect">
+            <a:avLst/>
+          </a:prstGeom>
+          <a:noFill/>
+        </p:spPr>
+        <p:txBody>
+          <a:bodyPr wrap="square" anchor="t">
+            <a:spAutoFit/>
+          </a:bodyPr>
+          <a:lstStyle/>
+          <a:p>
+            <a:pPr algn="l"/>
+            <a:r>
+              <a:rPr sz="1100" b="1">
+                <a:solidFill>
+                  <a:srgbClr val="43C2A9"/>
+                </a:solidFill>
+                <a:latin typeface="Segoe UI"/>
+              </a:rPr>
+              <a:t>03</a:t>
+            </a:r>
+          </a:p>
+        </p:txBody>
+      </p:sp>
+      <p:sp>
+        <p:nvSpPr>
+          <p:cNvPr id="17" name="TextBox 16"/>
+          <p:cNvSpPr txBox="1"/>
+          <p:nvPr/>
+        </p:nvSpPr>
+        <p:spPr>
+          <a:xfrm>
+            <a:off x="4782310" y="2743200"/>
+            <a:ext cx="1691639" cy="320040"/>
+          </a:xfrm>
+          <a:prstGeom prst="rect">
+            <a:avLst/>
+          </a:prstGeom>
+          <a:noFill/>
+        </p:spPr>
+        <p:txBody>
+          <a:bodyPr wrap="square" anchor="t">
+            <a:spAutoFit/>
+          </a:bodyPr>
+          <a:lstStyle/>
+          <a:p>
+            <a:pPr algn="l"/>
+            <a:r>
+              <a:rPr sz="1200" b="1">
                 <a:solidFill>
                   <a:srgbClr val="E8EDE9"/>
                 </a:solidFill>
                 <a:latin typeface="Segoe UI"/>
               </a:rPr>
-              <a:t>Refusal or timeout → action does not execute</a:t>
-            </a:r>
-          </a:p>
-          <a:p>
-            <a:pPr>
-              <a:spcAft>
-                <a:spcPts val="600"/>
-              </a:spcAft>
-            </a:pPr>
-            <a:r>
-              <a:rPr sz="1300">
+              <a:t>Record &amp; sign</a:t>
+            </a:r>
+          </a:p>
+        </p:txBody>
+      </p:sp>
+      <p:sp>
+        <p:nvSpPr>
+          <p:cNvPr id="18" name="TextBox 17"/>
+          <p:cNvSpPr txBox="1"/>
+          <p:nvPr/>
+        </p:nvSpPr>
+        <p:spPr>
+          <a:xfrm>
+            <a:off x="4782310" y="3108960"/>
+            <a:ext cx="1691639" cy="1188720"/>
+          </a:xfrm>
+          <a:prstGeom prst="rect">
+            <a:avLst/>
+          </a:prstGeom>
+          <a:noFill/>
+        </p:spPr>
+        <p:txBody>
+          <a:bodyPr wrap="square" anchor="t">
+            <a:spAutoFit/>
+          </a:bodyPr>
+          <a:lstStyle/>
+          <a:p>
+            <a:pPr algn="l"/>
+            <a:r>
+              <a:rPr sz="1000" b="0">
+                <a:solidFill>
+                  <a:srgbClr val="9EB0AC"/>
+                </a:solidFill>
+                <a:latin typeface="Segoe UI"/>
+              </a:rPr>
+              <a:t>Append-only ledger, witness batches</a:t>
+            </a:r>
+          </a:p>
+        </p:txBody>
+      </p:sp>
+      <p:sp>
+        <p:nvSpPr>
+          <p:cNvPr id="19" name="Rounded Rectangle 18"/>
+          <p:cNvSpPr/>
+          <p:nvPr/>
+        </p:nvSpPr>
+        <p:spPr>
+          <a:xfrm>
+            <a:off x="6711693" y="2331720"/>
+            <a:ext cx="1874519" cy="2148840"/>
+          </a:xfrm>
+          <a:prstGeom prst="roundRect">
+            <a:avLst/>
+          </a:prstGeom>
+          <a:solidFill>
+            <a:srgbClr val="141917"/>
+          </a:solidFill>
+          <a:ln w="9525">
+            <a:solidFill>
+              <a:srgbClr val="273A38"/>
+            </a:solidFill>
+          </a:ln>
+        </p:spPr>
+        <p:style>
+          <a:lnRef idx="1">
+            <a:schemeClr val="accent1"/>
+          </a:lnRef>
+          <a:fillRef idx="3">
+            <a:schemeClr val="accent1"/>
+          </a:fillRef>
+          <a:effectRef idx="2">
+            <a:schemeClr val="accent1"/>
+          </a:effectRef>
+          <a:fontRef idx="minor">
+            <a:schemeClr val="lt1"/>
+          </a:fontRef>
+        </p:style>
+        <p:txBody>
+          <a:bodyPr rtlCol="0" anchor="ctr"/>
+          <a:lstStyle/>
+          <a:p>
+            <a:pPr algn="ctr"/>
+          </a:p>
+        </p:txBody>
+      </p:sp>
+      <p:sp>
+        <p:nvSpPr>
+          <p:cNvPr id="20" name="TextBox 19"/>
+          <p:cNvSpPr txBox="1"/>
+          <p:nvPr/>
+        </p:nvSpPr>
+        <p:spPr>
+          <a:xfrm>
+            <a:off x="6821421" y="2468880"/>
+            <a:ext cx="365760" cy="228600"/>
+          </a:xfrm>
+          <a:prstGeom prst="rect">
+            <a:avLst/>
+          </a:prstGeom>
+          <a:noFill/>
+        </p:spPr>
+        <p:txBody>
+          <a:bodyPr wrap="square" anchor="t">
+            <a:spAutoFit/>
+          </a:bodyPr>
+          <a:lstStyle/>
+          <a:p>
+            <a:pPr algn="l"/>
+            <a:r>
+              <a:rPr sz="1100" b="1">
+                <a:solidFill>
+                  <a:srgbClr val="43C2A9"/>
+                </a:solidFill>
+                <a:latin typeface="Segoe UI"/>
+              </a:rPr>
+              <a:t>04</a:t>
+            </a:r>
+          </a:p>
+        </p:txBody>
+      </p:sp>
+      <p:sp>
+        <p:nvSpPr>
+          <p:cNvPr id="21" name="TextBox 20"/>
+          <p:cNvSpPr txBox="1"/>
+          <p:nvPr/>
+        </p:nvSpPr>
+        <p:spPr>
+          <a:xfrm>
+            <a:off x="6821421" y="2743200"/>
+            <a:ext cx="1691639" cy="320040"/>
+          </a:xfrm>
+          <a:prstGeom prst="rect">
+            <a:avLst/>
+          </a:prstGeom>
+          <a:noFill/>
+        </p:spPr>
+        <p:txBody>
+          <a:bodyPr wrap="square" anchor="t">
+            <a:spAutoFit/>
+          </a:bodyPr>
+          <a:lstStyle/>
+          <a:p>
+            <a:pPr algn="l"/>
+            <a:r>
+              <a:rPr sz="1200" b="1">
                 <a:solidFill>
                   <a:srgbClr val="E8EDE9"/>
                 </a:solidFill>
                 <a:latin typeface="Segoe UI"/>
               </a:rPr>
-              <a:t>Full history: approved, refused, expired — with rule applied</a:t>
+              <a:t>Replay &amp; export</a:t>
+            </a:r>
+          </a:p>
+        </p:txBody>
+      </p:sp>
+      <p:sp>
+        <p:nvSpPr>
+          <p:cNvPr id="22" name="TextBox 21"/>
+          <p:cNvSpPr txBox="1"/>
+          <p:nvPr/>
+        </p:nvSpPr>
+        <p:spPr>
+          <a:xfrm>
+            <a:off x="6821421" y="3108960"/>
+            <a:ext cx="1691639" cy="1188720"/>
+          </a:xfrm>
+          <a:prstGeom prst="rect">
+            <a:avLst/>
+          </a:prstGeom>
+          <a:noFill/>
+        </p:spPr>
+        <p:txBody>
+          <a:bodyPr wrap="square" anchor="t">
+            <a:spAutoFit/>
+          </a:bodyPr>
+          <a:lstStyle/>
+          <a:p>
+            <a:pPr algn="l"/>
+            <a:r>
+              <a:rPr sz="1000" b="0">
+                <a:solidFill>
+                  <a:srgbClr val="9EB0AC"/>
+                </a:solidFill>
+                <a:latin typeface="Segoe UI"/>
+              </a:rPr>
+              <a:t>Console, verification, audit bundles</a:t>
             </a:r>
           </a:p>
         </p:txBody>
@@ -8315,7 +8676,7 @@
                 </a:solidFill>
                 <a:latin typeface="Segoe UI"/>
               </a:rPr>
-              <a:t>AUDIT &amp; COMPLIANCE</a:t>
+              <a:t>LIVE DEMO</a:t>
             </a:r>
           </a:p>
         </p:txBody>
@@ -8350,7 +8711,7 @@
                 </a:solidFill>
                 <a:latin typeface="Segoe UI"/>
               </a:rPr>
-              <a:t>Evidence for your reviews</a:t>
+              <a:t>Bank scenario: outbound transfer above limit</a:t>
             </a:r>
           </a:p>
         </p:txBody>
@@ -8400,14 +8761,94 @@
       </p:sp>
       <p:sp>
         <p:nvSpPr>
-          <p:cNvPr id="7" name="TextBox 6"/>
-          <p:cNvSpPr txBox="1"/>
+          <p:cNvPr id="7" name="Rounded Rectangle 6"/>
+          <p:cNvSpPr/>
           <p:nvPr/>
         </p:nvSpPr>
         <p:spPr>
           <a:xfrm>
             <a:off x="594360" y="2148840"/>
-            <a:ext cx="7955279" cy="2926080"/>
+            <a:ext cx="7955279" cy="3063240"/>
+          </a:xfrm>
+          <a:prstGeom prst="roundRect">
+            <a:avLst/>
+          </a:prstGeom>
+          <a:solidFill>
+            <a:srgbClr val="141917"/>
+          </a:solidFill>
+          <a:ln w="9525">
+            <a:solidFill>
+              <a:srgbClr val="273A38"/>
+            </a:solidFill>
+          </a:ln>
+        </p:spPr>
+        <p:style>
+          <a:lnRef idx="1">
+            <a:schemeClr val="accent1"/>
+          </a:lnRef>
+          <a:fillRef idx="3">
+            <a:schemeClr val="accent1"/>
+          </a:fillRef>
+          <a:effectRef idx="2">
+            <a:schemeClr val="accent1"/>
+          </a:effectRef>
+          <a:fontRef idx="minor">
+            <a:schemeClr val="lt1"/>
+          </a:fontRef>
+        </p:style>
+        <p:txBody>
+          <a:bodyPr rtlCol="0" anchor="ctr"/>
+          <a:lstStyle/>
+          <a:p>
+            <a:pPr algn="ctr"/>
+          </a:p>
+        </p:txBody>
+      </p:sp>
+      <p:sp>
+        <p:nvSpPr>
+          <p:cNvPr id="8" name="TextBox 7"/>
+          <p:cNvSpPr txBox="1"/>
+          <p:nvPr/>
+        </p:nvSpPr>
+        <p:spPr>
+          <a:xfrm>
+            <a:off x="822960" y="2331720"/>
+            <a:ext cx="7315200" cy="411480"/>
+          </a:xfrm>
+          <a:prstGeom prst="rect">
+            <a:avLst/>
+          </a:prstGeom>
+          <a:noFill/>
+        </p:spPr>
+        <p:txBody>
+          <a:bodyPr wrap="square" anchor="t">
+            <a:spAutoFit/>
+          </a:bodyPr>
+          <a:lstStyle/>
+          <a:p>
+            <a:pPr algn="l"/>
+            <a:r>
+              <a:rPr sz="1300" b="1">
+                <a:solidFill>
+                  <a:srgbClr val="E8EDE9"/>
+                </a:solidFill>
+                <a:latin typeface="Segoe UI"/>
+              </a:rPr>
+              <a:t>Case: workflow attempts USD 2,500 transfer. Rule: above USD 1,000 requires human approval.</a:t>
+            </a:r>
+          </a:p>
+        </p:txBody>
+      </p:sp>
+      <p:sp>
+        <p:nvSpPr>
+          <p:cNvPr id="9" name="TextBox 8"/>
+          <p:cNvSpPr txBox="1"/>
+          <p:nvPr/>
+        </p:nvSpPr>
+        <p:spPr>
+          <a:xfrm>
+            <a:off x="822960" y="2788920"/>
+            <a:ext cx="7315200" cy="2194560"/>
           </a:xfrm>
           <a:prstGeom prst="rect">
             <a:avLst/>
@@ -8432,7 +8873,7 @@
                 </a:solidFill>
                 <a:latin typeface="Segoe UI"/>
               </a:rPr>
-              <a:t>Exports by period with verifiable integrity hash</a:t>
+              <a:t>Without governance → payment goes when workflow runs</a:t>
             </a:r>
           </a:p>
           <a:p>
@@ -8448,7 +8889,7 @@
                 </a:solidFill>
                 <a:latin typeface="Segoe UI"/>
               </a:rPr>
-              <a:t>Control mappings: SOC 2 &amp; EU AI Act in exports today (documentation aid, not certification)</a:t>
+              <a:t>With Aegis → workflow stops; approver sees amount, beneficiary, context</a:t>
             </a:r>
           </a:p>
           <a:p>
@@ -8464,7 +8905,7 @@
                 </a:solidFill>
                 <a:latin typeface="Segoe UI"/>
               </a:rPr>
-              <a:t>Step-by-step replay in the console</a:t>
+              <a:t>No approval → no payment. Every step recorded and signed.</a:t>
             </a:r>
           </a:p>
           <a:p>
@@ -8480,7 +8921,42 @@
                 </a:solidFill>
                 <a:latin typeface="Segoe UI"/>
               </a:rPr>
-              <a:t>Admin audit log: policies, keys, connections, exports</a:t>
+              <a:t>Same pattern for claims, KYC, limit changes.</a:t>
+            </a:r>
+          </a:p>
+        </p:txBody>
+      </p:sp>
+      <p:sp>
+        <p:nvSpPr>
+          <p:cNvPr id="10" name="TextBox 9"/>
+          <p:cNvSpPr txBox="1"/>
+          <p:nvPr/>
+        </p:nvSpPr>
+        <p:spPr>
+          <a:xfrm>
+            <a:off x="594360" y="5486400"/>
+            <a:ext cx="7955279" cy="320040"/>
+          </a:xfrm>
+          <a:prstGeom prst="rect">
+            <a:avLst/>
+          </a:prstGeom>
+          <a:noFill/>
+        </p:spPr>
+        <p:txBody>
+          <a:bodyPr wrap="square" anchor="t">
+            <a:spAutoFit/>
+          </a:bodyPr>
+          <a:lstStyle/>
+          <a:p>
+            <a:pPr algn="l"/>
+            <a:r>
+              <a:rPr sz="1100" b="0">
+                <a:solidFill>
+                  <a:srgbClr val="718582"/>
+                </a:solidFill>
+                <a:latin typeface="Segoe UI"/>
+              </a:rPr>
+              <a:t>Demo: app.salanor.com · Prepare Approvals history before the meeting</a:t>
             </a:r>
           </a:p>
         </p:txBody>
@@ -8600,7 +9076,7 @@
                 </a:solidFill>
                 <a:latin typeface="Segoe UI"/>
               </a:rPr>
-              <a:t>PILOT OFFER</a:t>
+              <a:t>HUMAN APPROVAL</a:t>
             </a:r>
           </a:p>
         </p:txBody>
@@ -8635,7 +9111,7 @@
                 </a:solidFill>
                 <a:latin typeface="Segoe UI"/>
               </a:rPr>
-              <a:t>30 days · one workflow · measurable proof</a:t>
+              <a:t>“Proposed by the system” vs “authorized by a person”</a:t>
             </a:r>
           </a:p>
         </p:txBody>
@@ -8685,610 +9161,87 @@
       </p:sp>
       <p:sp>
         <p:nvSpPr>
-          <p:cNvPr id="7" name="Rounded Rectangle 6"/>
-          <p:cNvSpPr/>
+          <p:cNvPr id="7" name="TextBox 6"/>
+          <p:cNvSpPr txBox="1"/>
           <p:nvPr/>
         </p:nvSpPr>
         <p:spPr>
           <a:xfrm>
             <a:off x="594360" y="2148840"/>
-            <a:ext cx="7955279" cy="658368"/>
-          </a:xfrm>
-          <a:prstGeom prst="roundRect">
-            <a:avLst/>
-          </a:prstGeom>
-          <a:solidFill>
-            <a:srgbClr val="141917"/>
-          </a:solidFill>
-          <a:ln w="9525">
-            <a:solidFill>
-              <a:srgbClr val="273A38"/>
-            </a:solidFill>
-          </a:ln>
-        </p:spPr>
-        <p:style>
-          <a:lnRef idx="1">
-            <a:schemeClr val="accent1"/>
-          </a:lnRef>
-          <a:fillRef idx="3">
-            <a:schemeClr val="accent1"/>
-          </a:fillRef>
-          <a:effectRef idx="2">
-            <a:schemeClr val="accent1"/>
-          </a:effectRef>
-          <a:fontRef idx="minor">
-            <a:schemeClr val="lt1"/>
-          </a:fontRef>
-        </p:style>
-        <p:txBody>
-          <a:bodyPr rtlCol="0" anchor="ctr"/>
-          <a:lstStyle/>
-          <a:p>
-            <a:pPr algn="ctr"/>
-          </a:p>
-        </p:txBody>
-      </p:sp>
-      <p:sp>
-        <p:nvSpPr>
-          <p:cNvPr id="8" name="TextBox 7"/>
-          <p:cNvSpPr txBox="1"/>
-          <p:nvPr/>
-        </p:nvSpPr>
-        <p:spPr>
-          <a:xfrm>
-            <a:off x="777240" y="2258568"/>
-            <a:ext cx="1280160" cy="256032"/>
-          </a:xfrm>
-          <a:prstGeom prst="rect">
-            <a:avLst/>
-          </a:prstGeom>
-          <a:noFill/>
-        </p:spPr>
-        <p:txBody>
-          <a:bodyPr wrap="square" anchor="t">
-            <a:spAutoFit/>
-          </a:bodyPr>
-          <a:lstStyle/>
-          <a:p>
-            <a:pPr algn="l"/>
-            <a:r>
-              <a:rPr sz="1100" b="1">
-                <a:solidFill>
-                  <a:srgbClr val="43C2A9"/>
-                </a:solidFill>
-                <a:latin typeface="Segoe UI"/>
-              </a:rPr>
-              <a:t>Scope</a:t>
-            </a:r>
-          </a:p>
-        </p:txBody>
-      </p:sp>
-      <p:sp>
-        <p:nvSpPr>
-          <p:cNvPr id="9" name="TextBox 8"/>
-          <p:cNvSpPr txBox="1"/>
-          <p:nvPr/>
-        </p:nvSpPr>
-        <p:spPr>
-          <a:xfrm>
-            <a:off x="2194560" y="2276856"/>
-            <a:ext cx="5943600" cy="411480"/>
-          </a:xfrm>
-          <a:prstGeom prst="rect">
-            <a:avLst/>
-          </a:prstGeom>
-          <a:noFill/>
-        </p:spPr>
-        <p:txBody>
-          <a:bodyPr wrap="square" anchor="t">
-            <a:spAutoFit/>
-          </a:bodyPr>
-          <a:lstStyle/>
-          <a:p>
-            <a:pPr algn="l"/>
-            <a:r>
-              <a:rPr sz="1200" b="0">
-                <a:solidFill>
-                  <a:srgbClr val="9EB0AC"/>
-                </a:solidFill>
-                <a:latin typeface="Segoe UI"/>
-              </a:rPr>
-              <a:t>One process — payment, claim, KYC, etc.</a:t>
-            </a:r>
-          </a:p>
-        </p:txBody>
-      </p:sp>
-      <p:sp>
-        <p:nvSpPr>
-          <p:cNvPr id="10" name="Rounded Rectangle 9"/>
-          <p:cNvSpPr/>
-          <p:nvPr/>
-        </p:nvSpPr>
-        <p:spPr>
-          <a:xfrm>
-            <a:off x="594360" y="2898648"/>
-            <a:ext cx="7955279" cy="658368"/>
-          </a:xfrm>
-          <a:prstGeom prst="roundRect">
-            <a:avLst/>
-          </a:prstGeom>
-          <a:solidFill>
-            <a:srgbClr val="141917"/>
-          </a:solidFill>
-          <a:ln w="9525">
-            <a:solidFill>
-              <a:srgbClr val="273A38"/>
-            </a:solidFill>
-          </a:ln>
-        </p:spPr>
-        <p:style>
-          <a:lnRef idx="1">
-            <a:schemeClr val="accent1"/>
-          </a:lnRef>
-          <a:fillRef idx="3">
-            <a:schemeClr val="accent1"/>
-          </a:fillRef>
-          <a:effectRef idx="2">
-            <a:schemeClr val="accent1"/>
-          </a:effectRef>
-          <a:fontRef idx="minor">
-            <a:schemeClr val="lt1"/>
-          </a:fontRef>
-        </p:style>
-        <p:txBody>
-          <a:bodyPr rtlCol="0" anchor="ctr"/>
-          <a:lstStyle/>
-          <a:p>
-            <a:pPr algn="ctr"/>
-          </a:p>
-        </p:txBody>
-      </p:sp>
-      <p:sp>
-        <p:nvSpPr>
-          <p:cNvPr id="11" name="TextBox 10"/>
-          <p:cNvSpPr txBox="1"/>
-          <p:nvPr/>
-        </p:nvSpPr>
-        <p:spPr>
-          <a:xfrm>
-            <a:off x="777240" y="3008376"/>
-            <a:ext cx="1280160" cy="256032"/>
-          </a:xfrm>
-          <a:prstGeom prst="rect">
-            <a:avLst/>
-          </a:prstGeom>
-          <a:noFill/>
-        </p:spPr>
-        <p:txBody>
-          <a:bodyPr wrap="square" anchor="t">
-            <a:spAutoFit/>
-          </a:bodyPr>
-          <a:lstStyle/>
-          <a:p>
-            <a:pPr algn="l"/>
-            <a:r>
-              <a:rPr sz="1100" b="1">
-                <a:solidFill>
-                  <a:srgbClr val="43C2A9"/>
-                </a:solidFill>
-                <a:latin typeface="Segoe UI"/>
-              </a:rPr>
-              <a:t>Delivered</a:t>
-            </a:r>
-          </a:p>
-        </p:txBody>
-      </p:sp>
-      <p:sp>
-        <p:nvSpPr>
-          <p:cNvPr id="12" name="TextBox 11"/>
-          <p:cNvSpPr txBox="1"/>
-          <p:nvPr/>
-        </p:nvSpPr>
-        <p:spPr>
-          <a:xfrm>
-            <a:off x="2194560" y="3026664"/>
-            <a:ext cx="5943600" cy="411480"/>
-          </a:xfrm>
-          <a:prstGeom prst="rect">
-            <a:avLst/>
-          </a:prstGeom>
-          <a:noFill/>
-        </p:spPr>
-        <p:txBody>
-          <a:bodyPr wrap="square" anchor="t">
-            <a:spAutoFit/>
-          </a:bodyPr>
-          <a:lstStyle/>
-          <a:p>
-            <a:pPr algn="l"/>
-            <a:r>
-              <a:rPr sz="1200" b="0">
-                <a:solidFill>
-                  <a:srgbClr val="9EB0AC"/>
-                </a:solidFill>
-                <a:latin typeface="Segoe UI"/>
-              </a:rPr>
-              <a:t>Rules, approvals, register, training, one audit export</a:t>
-            </a:r>
-          </a:p>
-        </p:txBody>
-      </p:sp>
-      <p:sp>
-        <p:nvSpPr>
-          <p:cNvPr id="13" name="Rounded Rectangle 12"/>
-          <p:cNvSpPr/>
-          <p:nvPr/>
-        </p:nvSpPr>
-        <p:spPr>
-          <a:xfrm>
-            <a:off x="594360" y="3648456"/>
-            <a:ext cx="7955279" cy="658368"/>
-          </a:xfrm>
-          <a:prstGeom prst="roundRect">
-            <a:avLst/>
-          </a:prstGeom>
-          <a:solidFill>
-            <a:srgbClr val="141917"/>
-          </a:solidFill>
-          <a:ln w="9525">
-            <a:solidFill>
-              <a:srgbClr val="273A38"/>
-            </a:solidFill>
-          </a:ln>
-        </p:spPr>
-        <p:style>
-          <a:lnRef idx="1">
-            <a:schemeClr val="accent1"/>
-          </a:lnRef>
-          <a:fillRef idx="3">
-            <a:schemeClr val="accent1"/>
-          </a:fillRef>
-          <a:effectRef idx="2">
-            <a:schemeClr val="accent1"/>
-          </a:effectRef>
-          <a:fontRef idx="minor">
-            <a:schemeClr val="lt1"/>
-          </a:fontRef>
-        </p:style>
-        <p:txBody>
-          <a:bodyPr rtlCol="0" anchor="ctr"/>
-          <a:lstStyle/>
-          <a:p>
-            <a:pPr algn="ctr"/>
-          </a:p>
-        </p:txBody>
-      </p:sp>
-      <p:sp>
-        <p:nvSpPr>
-          <p:cNvPr id="14" name="TextBox 13"/>
-          <p:cNvSpPr txBox="1"/>
-          <p:nvPr/>
-        </p:nvSpPr>
-        <p:spPr>
-          <a:xfrm>
-            <a:off x="777240" y="3758183"/>
-            <a:ext cx="1280160" cy="256032"/>
-          </a:xfrm>
-          <a:prstGeom prst="rect">
-            <a:avLst/>
-          </a:prstGeom>
-          <a:noFill/>
-        </p:spPr>
-        <p:txBody>
-          <a:bodyPr wrap="square" anchor="t">
-            <a:spAutoFit/>
-          </a:bodyPr>
-          <a:lstStyle/>
-          <a:p>
-            <a:pPr algn="l"/>
-            <a:r>
-              <a:rPr sz="1100" b="1">
-                <a:solidFill>
-                  <a:srgbClr val="43C2A9"/>
-                </a:solidFill>
-                <a:latin typeface="Segoe UI"/>
-              </a:rPr>
-              <a:t>Platform</a:t>
-            </a:r>
-          </a:p>
-        </p:txBody>
-      </p:sp>
-      <p:sp>
-        <p:nvSpPr>
-          <p:cNvPr id="15" name="TextBox 14"/>
-          <p:cNvSpPr txBox="1"/>
-          <p:nvPr/>
-        </p:nvSpPr>
-        <p:spPr>
-          <a:xfrm>
-            <a:off x="2194560" y="3776472"/>
-            <a:ext cx="5943600" cy="411480"/>
-          </a:xfrm>
-          <a:prstGeom prst="rect">
-            <a:avLst/>
-          </a:prstGeom>
-          <a:noFill/>
-        </p:spPr>
-        <p:txBody>
-          <a:bodyPr wrap="square" anchor="t">
-            <a:spAutoFit/>
-          </a:bodyPr>
-          <a:lstStyle/>
-          <a:p>
-            <a:pPr algn="l"/>
-            <a:r>
-              <a:rPr sz="1200" b="0">
-                <a:solidFill>
-                  <a:srgbClr val="9EB0AC"/>
-                </a:solidFill>
-                <a:latin typeface="Segoe UI"/>
-              </a:rPr>
-              <a:t>Team tier from USD 299 / month</a:t>
-            </a:r>
-          </a:p>
-        </p:txBody>
-      </p:sp>
-      <p:sp>
-        <p:nvSpPr>
-          <p:cNvPr id="16" name="Rounded Rectangle 15"/>
-          <p:cNvSpPr/>
-          <p:nvPr/>
-        </p:nvSpPr>
-        <p:spPr>
-          <a:xfrm>
-            <a:off x="594360" y="4398264"/>
-            <a:ext cx="7955279" cy="658368"/>
-          </a:xfrm>
-          <a:prstGeom prst="roundRect">
-            <a:avLst/>
-          </a:prstGeom>
-          <a:solidFill>
-            <a:srgbClr val="141917"/>
-          </a:solidFill>
-          <a:ln w="9525">
-            <a:solidFill>
-              <a:srgbClr val="273A38"/>
-            </a:solidFill>
-          </a:ln>
-        </p:spPr>
-        <p:style>
-          <a:lnRef idx="1">
-            <a:schemeClr val="accent1"/>
-          </a:lnRef>
-          <a:fillRef idx="3">
-            <a:schemeClr val="accent1"/>
-          </a:fillRef>
-          <a:effectRef idx="2">
-            <a:schemeClr val="accent1"/>
-          </a:effectRef>
-          <a:fontRef idx="minor">
-            <a:schemeClr val="lt1"/>
-          </a:fontRef>
-        </p:style>
-        <p:txBody>
-          <a:bodyPr rtlCol="0" anchor="ctr"/>
-          <a:lstStyle/>
-          <a:p>
-            <a:pPr algn="ctr"/>
-          </a:p>
-        </p:txBody>
-      </p:sp>
-      <p:sp>
-        <p:nvSpPr>
-          <p:cNvPr id="17" name="TextBox 16"/>
-          <p:cNvSpPr txBox="1"/>
-          <p:nvPr/>
-        </p:nvSpPr>
-        <p:spPr>
-          <a:xfrm>
-            <a:off x="777240" y="4507992"/>
-            <a:ext cx="1280160" cy="256032"/>
-          </a:xfrm>
-          <a:prstGeom prst="rect">
-            <a:avLst/>
-          </a:prstGeom>
-          <a:noFill/>
-        </p:spPr>
-        <p:txBody>
-          <a:bodyPr wrap="square" anchor="t">
-            <a:spAutoFit/>
-          </a:bodyPr>
-          <a:lstStyle/>
-          <a:p>
-            <a:pPr algn="l"/>
-            <a:r>
-              <a:rPr sz="1100" b="1">
-                <a:solidFill>
-                  <a:srgbClr val="43C2A9"/>
-                </a:solidFill>
-                <a:latin typeface="Segoe UI"/>
-              </a:rPr>
-              <a:t>Setup</a:t>
-            </a:r>
-          </a:p>
-        </p:txBody>
-      </p:sp>
-      <p:sp>
-        <p:nvSpPr>
-          <p:cNvPr id="18" name="TextBox 17"/>
-          <p:cNvSpPr txBox="1"/>
-          <p:nvPr/>
-        </p:nvSpPr>
-        <p:spPr>
-          <a:xfrm>
-            <a:off x="2194560" y="4526279"/>
-            <a:ext cx="5943600" cy="411480"/>
-          </a:xfrm>
-          <a:prstGeom prst="rect">
-            <a:avLst/>
-          </a:prstGeom>
-          <a:noFill/>
-        </p:spPr>
-        <p:txBody>
-          <a:bodyPr wrap="square" anchor="t">
-            <a:spAutoFit/>
-          </a:bodyPr>
-          <a:lstStyle/>
-          <a:p>
-            <a:pPr algn="l"/>
-            <a:r>
-              <a:rPr sz="1200" b="0">
-                <a:solidFill>
-                  <a:srgbClr val="9EB0AC"/>
-                </a:solidFill>
-                <a:latin typeface="Segoe UI"/>
-              </a:rPr>
-              <a:t>Fixed fee by integration complexity</a:t>
-            </a:r>
-          </a:p>
-        </p:txBody>
-      </p:sp>
-      <p:sp>
-        <p:nvSpPr>
-          <p:cNvPr id="19" name="Rounded Rectangle 18"/>
-          <p:cNvSpPr/>
-          <p:nvPr/>
-        </p:nvSpPr>
-        <p:spPr>
-          <a:xfrm>
-            <a:off x="594360" y="5148072"/>
-            <a:ext cx="7955279" cy="658368"/>
-          </a:xfrm>
-          <a:prstGeom prst="roundRect">
-            <a:avLst/>
-          </a:prstGeom>
-          <a:solidFill>
-            <a:srgbClr val="141917"/>
-          </a:solidFill>
-          <a:ln w="9525">
-            <a:solidFill>
-              <a:srgbClr val="273A38"/>
-            </a:solidFill>
-          </a:ln>
-        </p:spPr>
-        <p:style>
-          <a:lnRef idx="1">
-            <a:schemeClr val="accent1"/>
-          </a:lnRef>
-          <a:fillRef idx="3">
-            <a:schemeClr val="accent1"/>
-          </a:fillRef>
-          <a:effectRef idx="2">
-            <a:schemeClr val="accent1"/>
-          </a:effectRef>
-          <a:fontRef idx="minor">
-            <a:schemeClr val="lt1"/>
-          </a:fontRef>
-        </p:style>
-        <p:txBody>
-          <a:bodyPr rtlCol="0" anchor="ctr"/>
-          <a:lstStyle/>
-          <a:p>
-            <a:pPr algn="ctr"/>
-          </a:p>
-        </p:txBody>
-      </p:sp>
-      <p:sp>
-        <p:nvSpPr>
-          <p:cNvPr id="20" name="TextBox 19"/>
-          <p:cNvSpPr txBox="1"/>
-          <p:nvPr/>
-        </p:nvSpPr>
-        <p:spPr>
-          <a:xfrm>
-            <a:off x="777240" y="5257800"/>
-            <a:ext cx="1280160" cy="256032"/>
-          </a:xfrm>
-          <a:prstGeom prst="rect">
-            <a:avLst/>
-          </a:prstGeom>
-          <a:noFill/>
-        </p:spPr>
-        <p:txBody>
-          <a:bodyPr wrap="square" anchor="t">
-            <a:spAutoFit/>
-          </a:bodyPr>
-          <a:lstStyle/>
-          <a:p>
-            <a:pPr algn="l"/>
-            <a:r>
-              <a:rPr sz="1100" b="1">
-                <a:solidFill>
-                  <a:srgbClr val="43C2A9"/>
-                </a:solidFill>
-                <a:latin typeface="Segoe UI"/>
-              </a:rPr>
-              <a:t>Success</a:t>
-            </a:r>
-          </a:p>
-        </p:txBody>
-      </p:sp>
-      <p:sp>
-        <p:nvSpPr>
-          <p:cNvPr id="21" name="TextBox 20"/>
-          <p:cNvSpPr txBox="1"/>
-          <p:nvPr/>
-        </p:nvSpPr>
-        <p:spPr>
-          <a:xfrm>
-            <a:off x="2194560" y="5276088"/>
-            <a:ext cx="5943600" cy="411480"/>
-          </a:xfrm>
-          <a:prstGeom prst="rect">
-            <a:avLst/>
-          </a:prstGeom>
-          <a:noFill/>
-        </p:spPr>
-        <p:txBody>
-          <a:bodyPr wrap="square" anchor="t">
-            <a:spAutoFit/>
-          </a:bodyPr>
-          <a:lstStyle/>
-          <a:p>
-            <a:pPr algn="l"/>
-            <a:r>
-              <a:rPr sz="1200" b="0">
-                <a:solidFill>
-                  <a:srgbClr val="9EB0AC"/>
-                </a:solidFill>
-                <a:latin typeface="Segoe UI"/>
-              </a:rPr>
-              <a:t>One sensitive operation, human-approved, verifiable by risk or audit</a:t>
-            </a:r>
-          </a:p>
-        </p:txBody>
-      </p:sp>
-      <p:sp>
-        <p:nvSpPr>
-          <p:cNvPr id="22" name="TextBox 21"/>
-          <p:cNvSpPr txBox="1"/>
-          <p:nvPr/>
-        </p:nvSpPr>
-        <p:spPr>
-          <a:xfrm>
-            <a:off x="594360" y="5806440"/>
-            <a:ext cx="7955279" cy="274320"/>
-          </a:xfrm>
-          <a:prstGeom prst="rect">
-            <a:avLst/>
-          </a:prstGeom>
-          <a:noFill/>
-        </p:spPr>
-        <p:txBody>
-          <a:bodyPr wrap="square" anchor="t">
-            <a:spAutoFit/>
-          </a:bodyPr>
-          <a:lstStyle/>
-          <a:p>
-            <a:pPr algn="l"/>
-            <a:r>
-              <a:rPr sz="1000" b="0">
-                <a:solidFill>
-                  <a:srgbClr val="718582"/>
-                </a:solidFill>
-                <a:latin typeface="Segoe UI"/>
-              </a:rPr>
-              <a:t>api.salanor.com · app.salanor.com · n8n, TypeScript, Python, Go SDKs</a:t>
+            <a:ext cx="7955279" cy="2926080"/>
+          </a:xfrm>
+          <a:prstGeom prst="rect">
+            <a:avLst/>
+          </a:prstGeom>
+          <a:noFill/>
+        </p:spPr>
+        <p:txBody>
+          <a:bodyPr wrap="square">
+            <a:spAutoFit/>
+          </a:bodyPr>
+          <a:lstStyle/>
+          <a:p>
+            <a:pPr>
+              <a:spcAft>
+                <a:spcPts val="600"/>
+              </a:spcAft>
+            </a:pPr>
+            <a:r>
+              <a:rPr sz="1300">
+                <a:solidFill>
+                  <a:srgbClr val="E8EDE9"/>
+                </a:solidFill>
+                <a:latin typeface="Segoe UI"/>
+              </a:rPr>
+              <a:t>Alerts via email, Slack, PagerDuty, or SMS</a:t>
+            </a:r>
+          </a:p>
+          <a:p>
+            <a:pPr>
+              <a:spcAft>
+                <a:spcPts val="600"/>
+              </a:spcAft>
+            </a:pPr>
+            <a:r>
+              <a:rPr sz="1300">
+                <a:solidFill>
+                  <a:srgbClr val="E8EDE9"/>
+                </a:solidFill>
+                <a:latin typeface="Segoe UI"/>
+              </a:rPr>
+              <a:t>Named approver, timestamp, one trace</a:t>
+            </a:r>
+          </a:p>
+          <a:p>
+            <a:pPr>
+              <a:spcAft>
+                <a:spcPts val="600"/>
+              </a:spcAft>
+            </a:pPr>
+            <a:r>
+              <a:rPr sz="1300">
+                <a:solidFill>
+                  <a:srgbClr val="E8EDE9"/>
+                </a:solidFill>
+                <a:latin typeface="Segoe UI"/>
+              </a:rPr>
+              <a:t>Refusal or timeout → action does not execute</a:t>
+            </a:r>
+          </a:p>
+          <a:p>
+            <a:pPr>
+              <a:spcAft>
+                <a:spcPts val="600"/>
+              </a:spcAft>
+            </a:pPr>
+            <a:r>
+              <a:rPr sz="1300">
+                <a:solidFill>
+                  <a:srgbClr val="E8EDE9"/>
+                </a:solidFill>
+                <a:latin typeface="Segoe UI"/>
+              </a:rPr>
+              <a:t>Full history: approved, refused, expired — with rule applied</a:t>
             </a:r>
           </a:p>
         </p:txBody>
@@ -9408,7 +9361,7 @@
                 </a:solidFill>
                 <a:latin typeface="Segoe UI"/>
               </a:rPr>
-              <a:t>DISCUSSION</a:t>
+              <a:t>AUDIT &amp; COMPLIANCE</a:t>
             </a:r>
           </a:p>
         </p:txBody>
@@ -9443,7 +9396,7 @@
                 </a:solidFill>
                 <a:latin typeface="Segoe UI"/>
               </a:rPr>
-              <a:t>Questions to move forward</a:t>
+              <a:t>Evidence for your reviews</a:t>
             </a:r>
           </a:p>
         </p:txBody>
@@ -9500,7 +9453,7 @@
         <p:spPr>
           <a:xfrm>
             <a:off x="594360" y="2148840"/>
-            <a:ext cx="7955279" cy="3200400"/>
+            <a:ext cx="7955279" cy="2926080"/>
           </a:xfrm>
           <a:prstGeom prst="rect">
             <a:avLst/>
@@ -9519,13 +9472,13 @@
               </a:spcAft>
             </a:pPr>
             <a:r>
-              <a:rPr sz="1300">
+              <a:rPr sz="1200">
                 <a:solidFill>
                   <a:srgbClr val="E8EDE9"/>
                 </a:solidFill>
                 <a:latin typeface="Segoe UI"/>
               </a:rPr>
-              <a:t>Which sensitive workflows still run manually — and hurt most in audit?</a:t>
+              <a:t>Exports by period with verifiable integrity hash</a:t>
             </a:r>
           </a:p>
           <a:p>
@@ -9535,13 +9488,13 @@
               </a:spcAft>
             </a:pPr>
             <a:r>
-              <a:rPr sz="1300">
+              <a:rPr sz="1200">
                 <a:solidFill>
                   <a:srgbClr val="E8EDE9"/>
                 </a:solidFill>
                 <a:latin typeface="Segoe UI"/>
               </a:rPr>
-              <a:t>Where do you require dual control — and how do you document it today?</a:t>
+              <a:t>Control mappings: SOC 2 &amp; EU AI Act in exports today (documentation aid, not certification)</a:t>
             </a:r>
           </a:p>
           <a:p>
@@ -9551,13 +9504,13 @@
               </a:spcAft>
             </a:pPr>
             <a:r>
-              <a:rPr sz="1300">
+              <a:rPr sz="1200">
                 <a:solidFill>
                   <a:srgbClr val="E8EDE9"/>
                 </a:solidFill>
                 <a:latin typeface="Segoe UI"/>
               </a:rPr>
-              <a:t>Would one automated workflow with signed trace + export unblock a project in 30 days?</a:t>
+              <a:t>Step-by-step replay in the console</a:t>
             </a:r>
           </a:p>
           <a:p>
@@ -9567,13 +9520,13 @@
               </a:spcAft>
             </a:pPr>
             <a:r>
-              <a:rPr sz="1300">
+              <a:rPr sz="1200">
                 <a:solidFill>
                   <a:srgbClr val="E8EDE9"/>
                 </a:solidFill>
                 <a:latin typeface="Segoe UI"/>
               </a:rPr>
-              <a:t>Who from risk, compliance, or IT must validate a pilot?</a:t>
+              <a:t>Admin audit log: policies, keys, connections, exports</a:t>
             </a:r>
           </a:p>
         </p:txBody>
@@ -9826,7 +9779,7 @@
                 </a:solidFill>
                 <a:latin typeface="Segoe UI"/>
               </a:rPr>
-              <a:t>Slow turnaround — clients wait; staff chase approvals</a:t>
+              <a:t>Slow turnaround: clients wait, staff chase approvals</a:t>
             </a:r>
           </a:p>
           <a:p>
@@ -9958,6 +9911,1427 @@
 </file>
 
 <file path=ppt/slides/slide20.xml><?xml version="1.0" encoding="utf-8"?>
+<p:sld xmlns:a="http://schemas.openxmlformats.org/drawingml/2006/main" xmlns:p="http://schemas.openxmlformats.org/presentationml/2006/main" xmlns:r="http://schemas.openxmlformats.org/officeDocument/2006/relationships">
+  <p:cSld>
+    <p:bg>
+      <p:bgPr>
+        <a:solidFill>
+          <a:srgbClr val="0A0C0B"/>
+        </a:solidFill>
+        <a:effectLst/>
+      </p:bgPr>
+    </p:bg>
+    <p:spTree>
+      <p:nvGrpSpPr>
+        <p:cNvPr id="1" name=""/>
+        <p:cNvGrpSpPr/>
+        <p:nvPr/>
+      </p:nvGrpSpPr>
+      <p:grpSpPr/>
+      <p:pic>
+        <p:nvPicPr>
+          <p:cNvPr id="2" name="Picture 1" descr="salanor-logo.png"/>
+          <p:cNvPicPr>
+            <a:picLocks noChangeAspect="1"/>
+          </p:cNvPicPr>
+          <p:nvPr/>
+        </p:nvPicPr>
+        <p:blipFill>
+          <a:blip r:embed="rId2"/>
+          <a:stretch>
+            <a:fillRect/>
+          </a:stretch>
+        </p:blipFill>
+        <p:spPr>
+          <a:xfrm>
+            <a:off x="594360" y="384048"/>
+            <a:ext cx="347472" cy="347472"/>
+          </a:xfrm>
+          <a:prstGeom prst="rect">
+            <a:avLst/>
+          </a:prstGeom>
+        </p:spPr>
+      </p:pic>
+      <p:sp>
+        <p:nvSpPr>
+          <p:cNvPr id="3" name="TextBox 2"/>
+          <p:cNvSpPr txBox="1"/>
+          <p:nvPr/>
+        </p:nvSpPr>
+        <p:spPr>
+          <a:xfrm>
+            <a:off x="987552" y="438912"/>
+            <a:ext cx="1097280" cy="228600"/>
+          </a:xfrm>
+          <a:prstGeom prst="rect">
+            <a:avLst/>
+          </a:prstGeom>
+          <a:noFill/>
+        </p:spPr>
+        <p:txBody>
+          <a:bodyPr wrap="square" anchor="t">
+            <a:spAutoFit/>
+          </a:bodyPr>
+          <a:lstStyle/>
+          <a:p>
+            <a:pPr algn="l"/>
+            <a:r>
+              <a:rPr sz="900" b="1">
+                <a:solidFill>
+                  <a:srgbClr val="718582"/>
+                </a:solidFill>
+                <a:latin typeface="Segoe UI"/>
+              </a:rPr>
+              <a:t>SALANOR</a:t>
+            </a:r>
+          </a:p>
+        </p:txBody>
+      </p:sp>
+      <p:sp>
+        <p:nvSpPr>
+          <p:cNvPr id="4" name="TextBox 3"/>
+          <p:cNvSpPr txBox="1"/>
+          <p:nvPr/>
+        </p:nvSpPr>
+        <p:spPr>
+          <a:xfrm>
+            <a:off x="594360" y="749808"/>
+            <a:ext cx="7955279" cy="256032"/>
+          </a:xfrm>
+          <a:prstGeom prst="rect">
+            <a:avLst/>
+          </a:prstGeom>
+          <a:noFill/>
+        </p:spPr>
+        <p:txBody>
+          <a:bodyPr wrap="square" anchor="t">
+            <a:spAutoFit/>
+          </a:bodyPr>
+          <a:lstStyle/>
+          <a:p>
+            <a:pPr algn="l"/>
+            <a:r>
+              <a:rPr sz="900" b="1">
+                <a:solidFill>
+                  <a:srgbClr val="43C2A9"/>
+                </a:solidFill>
+                <a:latin typeface="Segoe UI"/>
+              </a:rPr>
+              <a:t>WHAT WE DELIVER</a:t>
+            </a:r>
+          </a:p>
+        </p:txBody>
+      </p:sp>
+      <p:sp>
+        <p:nvSpPr>
+          <p:cNvPr id="5" name="TextBox 4"/>
+          <p:cNvSpPr txBox="1"/>
+          <p:nvPr/>
+        </p:nvSpPr>
+        <p:spPr>
+          <a:xfrm>
+            <a:off x="594360" y="960120"/>
+            <a:ext cx="7955279" cy="777240"/>
+          </a:xfrm>
+          <a:prstGeom prst="rect">
+            <a:avLst/>
+          </a:prstGeom>
+          <a:noFill/>
+        </p:spPr>
+        <p:txBody>
+          <a:bodyPr wrap="square" anchor="t">
+            <a:spAutoFit/>
+          </a:bodyPr>
+          <a:lstStyle/>
+          <a:p>
+            <a:pPr algn="l"/>
+            <a:r>
+              <a:rPr sz="2400" b="1">
+                <a:solidFill>
+                  <a:srgbClr val="E8EDE9"/>
+                </a:solidFill>
+                <a:latin typeface="Segoe UI"/>
+              </a:rPr>
+              <a:t>4 to 8 weeks · one workflow · automation + Aegis</a:t>
+            </a:r>
+          </a:p>
+        </p:txBody>
+      </p:sp>
+      <p:sp>
+        <p:nvSpPr>
+          <p:cNvPr id="6" name="Rectangle 5"/>
+          <p:cNvSpPr/>
+          <p:nvPr/>
+        </p:nvSpPr>
+        <p:spPr>
+          <a:xfrm>
+            <a:off x="594360" y="1719072"/>
+            <a:ext cx="1005840" cy="41148"/>
+          </a:xfrm>
+          <a:prstGeom prst="rect">
+            <a:avLst/>
+          </a:prstGeom>
+          <a:solidFill>
+            <a:srgbClr val="43C2A9"/>
+          </a:solidFill>
+          <a:ln>
+            <a:noFill/>
+          </a:ln>
+        </p:spPr>
+        <p:style>
+          <a:lnRef idx="1">
+            <a:schemeClr val="accent1"/>
+          </a:lnRef>
+          <a:fillRef idx="3">
+            <a:schemeClr val="accent1"/>
+          </a:fillRef>
+          <a:effectRef idx="2">
+            <a:schemeClr val="accent1"/>
+          </a:effectRef>
+          <a:fontRef idx="minor">
+            <a:schemeClr val="lt1"/>
+          </a:fontRef>
+        </p:style>
+        <p:txBody>
+          <a:bodyPr rtlCol="0" anchor="ctr"/>
+          <a:lstStyle/>
+          <a:p>
+            <a:pPr algn="ctr"/>
+          </a:p>
+        </p:txBody>
+      </p:sp>
+      <p:sp>
+        <p:nvSpPr>
+          <p:cNvPr id="7" name="Rounded Rectangle 6"/>
+          <p:cNvSpPr/>
+          <p:nvPr/>
+        </p:nvSpPr>
+        <p:spPr>
+          <a:xfrm>
+            <a:off x="594360" y="2148840"/>
+            <a:ext cx="7955279" cy="658368"/>
+          </a:xfrm>
+          <a:prstGeom prst="roundRect">
+            <a:avLst/>
+          </a:prstGeom>
+          <a:solidFill>
+            <a:srgbClr val="141917"/>
+          </a:solidFill>
+          <a:ln w="9525">
+            <a:solidFill>
+              <a:srgbClr val="273A38"/>
+            </a:solidFill>
+          </a:ln>
+        </p:spPr>
+        <p:style>
+          <a:lnRef idx="1">
+            <a:schemeClr val="accent1"/>
+          </a:lnRef>
+          <a:fillRef idx="3">
+            <a:schemeClr val="accent1"/>
+          </a:fillRef>
+          <a:effectRef idx="2">
+            <a:schemeClr val="accent1"/>
+          </a:effectRef>
+          <a:fontRef idx="minor">
+            <a:schemeClr val="lt1"/>
+          </a:fontRef>
+        </p:style>
+        <p:txBody>
+          <a:bodyPr rtlCol="0" anchor="ctr"/>
+          <a:lstStyle/>
+          <a:p>
+            <a:pPr algn="ctr"/>
+          </a:p>
+        </p:txBody>
+      </p:sp>
+      <p:sp>
+        <p:nvSpPr>
+          <p:cNvPr id="8" name="TextBox 7"/>
+          <p:cNvSpPr txBox="1"/>
+          <p:nvPr/>
+        </p:nvSpPr>
+        <p:spPr>
+          <a:xfrm>
+            <a:off x="777240" y="2258568"/>
+            <a:ext cx="1417320" cy="256032"/>
+          </a:xfrm>
+          <a:prstGeom prst="rect">
+            <a:avLst/>
+          </a:prstGeom>
+          <a:noFill/>
+        </p:spPr>
+        <p:txBody>
+          <a:bodyPr wrap="square" anchor="t">
+            <a:spAutoFit/>
+          </a:bodyPr>
+          <a:lstStyle/>
+          <a:p>
+            <a:pPr algn="l"/>
+            <a:r>
+              <a:rPr sz="1100" b="1">
+                <a:solidFill>
+                  <a:srgbClr val="43C2A9"/>
+                </a:solidFill>
+                <a:latin typeface="Segoe UI"/>
+              </a:rPr>
+              <a:t>Scope</a:t>
+            </a:r>
+          </a:p>
+        </p:txBody>
+      </p:sp>
+      <p:sp>
+        <p:nvSpPr>
+          <p:cNvPr id="9" name="TextBox 8"/>
+          <p:cNvSpPr txBox="1"/>
+          <p:nvPr/>
+        </p:nvSpPr>
+        <p:spPr>
+          <a:xfrm>
+            <a:off x="2286000" y="2276856"/>
+            <a:ext cx="5943600" cy="411480"/>
+          </a:xfrm>
+          <a:prstGeom prst="rect">
+            <a:avLst/>
+          </a:prstGeom>
+          <a:noFill/>
+        </p:spPr>
+        <p:txBody>
+          <a:bodyPr wrap="square" anchor="t">
+            <a:spAutoFit/>
+          </a:bodyPr>
+          <a:lstStyle/>
+          <a:p>
+            <a:pPr algn="l"/>
+            <a:r>
+              <a:rPr sz="1200" b="0">
+                <a:solidFill>
+                  <a:srgbClr val="9EB0AC"/>
+                </a:solidFill>
+                <a:latin typeface="Segoe UI"/>
+              </a:rPr>
+              <a:t>One process we automate for you: payment, claim, KYC, or similar</a:t>
+            </a:r>
+          </a:p>
+        </p:txBody>
+      </p:sp>
+      <p:sp>
+        <p:nvSpPr>
+          <p:cNvPr id="10" name="Rounded Rectangle 9"/>
+          <p:cNvSpPr/>
+          <p:nvPr/>
+        </p:nvSpPr>
+        <p:spPr>
+          <a:xfrm>
+            <a:off x="594360" y="2898648"/>
+            <a:ext cx="7955279" cy="658368"/>
+          </a:xfrm>
+          <a:prstGeom prst="roundRect">
+            <a:avLst/>
+          </a:prstGeom>
+          <a:solidFill>
+            <a:srgbClr val="141917"/>
+          </a:solidFill>
+          <a:ln w="9525">
+            <a:solidFill>
+              <a:srgbClr val="273A38"/>
+            </a:solidFill>
+          </a:ln>
+        </p:spPr>
+        <p:style>
+          <a:lnRef idx="1">
+            <a:schemeClr val="accent1"/>
+          </a:lnRef>
+          <a:fillRef idx="3">
+            <a:schemeClr val="accent1"/>
+          </a:fillRef>
+          <a:effectRef idx="2">
+            <a:schemeClr val="accent1"/>
+          </a:effectRef>
+          <a:fontRef idx="minor">
+            <a:schemeClr val="lt1"/>
+          </a:fontRef>
+        </p:style>
+        <p:txBody>
+          <a:bodyPr rtlCol="0" anchor="ctr"/>
+          <a:lstStyle/>
+          <a:p>
+            <a:pPr algn="ctr"/>
+          </a:p>
+        </p:txBody>
+      </p:sp>
+      <p:sp>
+        <p:nvSpPr>
+          <p:cNvPr id="11" name="TextBox 10"/>
+          <p:cNvSpPr txBox="1"/>
+          <p:nvPr/>
+        </p:nvSpPr>
+        <p:spPr>
+          <a:xfrm>
+            <a:off x="777240" y="3008376"/>
+            <a:ext cx="1417320" cy="256032"/>
+          </a:xfrm>
+          <a:prstGeom prst="rect">
+            <a:avLst/>
+          </a:prstGeom>
+          <a:noFill/>
+        </p:spPr>
+        <p:txBody>
+          <a:bodyPr wrap="square" anchor="t">
+            <a:spAutoFit/>
+          </a:bodyPr>
+          <a:lstStyle/>
+          <a:p>
+            <a:pPr algn="l"/>
+            <a:r>
+              <a:rPr sz="1100" b="1">
+                <a:solidFill>
+                  <a:srgbClr val="43C2A9"/>
+                </a:solidFill>
+                <a:latin typeface="Segoe UI"/>
+              </a:rPr>
+              <a:t>Built</a:t>
+            </a:r>
+          </a:p>
+        </p:txBody>
+      </p:sp>
+      <p:sp>
+        <p:nvSpPr>
+          <p:cNvPr id="12" name="TextBox 11"/>
+          <p:cNvSpPr txBox="1"/>
+          <p:nvPr/>
+        </p:nvSpPr>
+        <p:spPr>
+          <a:xfrm>
+            <a:off x="2286000" y="3026664"/>
+            <a:ext cx="5943600" cy="411480"/>
+          </a:xfrm>
+          <a:prstGeom prst="rect">
+            <a:avLst/>
+          </a:prstGeom>
+          <a:noFill/>
+        </p:spPr>
+        <p:txBody>
+          <a:bodyPr wrap="square" anchor="t">
+            <a:spAutoFit/>
+          </a:bodyPr>
+          <a:lstStyle/>
+          <a:p>
+            <a:pPr algn="l"/>
+            <a:r>
+              <a:rPr sz="1200" b="0">
+                <a:solidFill>
+                  <a:srgbClr val="9EB0AC"/>
+                </a:solidFill>
+                <a:latin typeface="Segoe UI"/>
+              </a:rPr>
+              <a:t>Workflow on your stack (n8n, API, scripts) with Aegis rules, approvals, signed trace</a:t>
+            </a:r>
+          </a:p>
+        </p:txBody>
+      </p:sp>
+      <p:sp>
+        <p:nvSpPr>
+          <p:cNvPr id="13" name="Rounded Rectangle 12"/>
+          <p:cNvSpPr/>
+          <p:nvPr/>
+        </p:nvSpPr>
+        <p:spPr>
+          <a:xfrm>
+            <a:off x="594360" y="3648456"/>
+            <a:ext cx="7955279" cy="658368"/>
+          </a:xfrm>
+          <a:prstGeom prst="roundRect">
+            <a:avLst/>
+          </a:prstGeom>
+          <a:solidFill>
+            <a:srgbClr val="141917"/>
+          </a:solidFill>
+          <a:ln w="9525">
+            <a:solidFill>
+              <a:srgbClr val="273A38"/>
+            </a:solidFill>
+          </a:ln>
+        </p:spPr>
+        <p:style>
+          <a:lnRef idx="1">
+            <a:schemeClr val="accent1"/>
+          </a:lnRef>
+          <a:fillRef idx="3">
+            <a:schemeClr val="accent1"/>
+          </a:fillRef>
+          <a:effectRef idx="2">
+            <a:schemeClr val="accent1"/>
+          </a:effectRef>
+          <a:fontRef idx="minor">
+            <a:schemeClr val="lt1"/>
+          </a:fontRef>
+        </p:style>
+        <p:txBody>
+          <a:bodyPr rtlCol="0" anchor="ctr"/>
+          <a:lstStyle/>
+          <a:p>
+            <a:pPr algn="ctr"/>
+          </a:p>
+        </p:txBody>
+      </p:sp>
+      <p:sp>
+        <p:nvSpPr>
+          <p:cNvPr id="14" name="TextBox 13"/>
+          <p:cNvSpPr txBox="1"/>
+          <p:nvPr/>
+        </p:nvSpPr>
+        <p:spPr>
+          <a:xfrm>
+            <a:off x="777240" y="3758183"/>
+            <a:ext cx="1417320" cy="256032"/>
+          </a:xfrm>
+          <a:prstGeom prst="rect">
+            <a:avLst/>
+          </a:prstGeom>
+          <a:noFill/>
+        </p:spPr>
+        <p:txBody>
+          <a:bodyPr wrap="square" anchor="t">
+            <a:spAutoFit/>
+          </a:bodyPr>
+          <a:lstStyle/>
+          <a:p>
+            <a:pPr algn="l"/>
+            <a:r>
+              <a:rPr sz="1100" b="1">
+                <a:solidFill>
+                  <a:srgbClr val="43C2A9"/>
+                </a:solidFill>
+                <a:latin typeface="Segoe UI"/>
+              </a:rPr>
+              <a:t>Platform</a:t>
+            </a:r>
+          </a:p>
+        </p:txBody>
+      </p:sp>
+      <p:sp>
+        <p:nvSpPr>
+          <p:cNvPr id="15" name="TextBox 14"/>
+          <p:cNvSpPr txBox="1"/>
+          <p:nvPr/>
+        </p:nvSpPr>
+        <p:spPr>
+          <a:xfrm>
+            <a:off x="2286000" y="3776472"/>
+            <a:ext cx="5943600" cy="411480"/>
+          </a:xfrm>
+          <a:prstGeom prst="rect">
+            <a:avLst/>
+          </a:prstGeom>
+          <a:noFill/>
+        </p:spPr>
+        <p:txBody>
+          <a:bodyPr wrap="square" anchor="t">
+            <a:spAutoFit/>
+          </a:bodyPr>
+          <a:lstStyle/>
+          <a:p>
+            <a:pPr algn="l"/>
+            <a:r>
+              <a:rPr sz="1200" b="0">
+                <a:solidFill>
+                  <a:srgbClr val="9EB0AC"/>
+                </a:solidFill>
+                <a:latin typeface="Segoe UI"/>
+              </a:rPr>
+              <a:t>Aegis Team tier from USD 299 / month</a:t>
+            </a:r>
+          </a:p>
+        </p:txBody>
+      </p:sp>
+      <p:sp>
+        <p:nvSpPr>
+          <p:cNvPr id="16" name="Rounded Rectangle 15"/>
+          <p:cNvSpPr/>
+          <p:nvPr/>
+        </p:nvSpPr>
+        <p:spPr>
+          <a:xfrm>
+            <a:off x="594360" y="4398264"/>
+            <a:ext cx="7955279" cy="658368"/>
+          </a:xfrm>
+          <a:prstGeom prst="roundRect">
+            <a:avLst/>
+          </a:prstGeom>
+          <a:solidFill>
+            <a:srgbClr val="141917"/>
+          </a:solidFill>
+          <a:ln w="9525">
+            <a:solidFill>
+              <a:srgbClr val="273A38"/>
+            </a:solidFill>
+          </a:ln>
+        </p:spPr>
+        <p:style>
+          <a:lnRef idx="1">
+            <a:schemeClr val="accent1"/>
+          </a:lnRef>
+          <a:fillRef idx="3">
+            <a:schemeClr val="accent1"/>
+          </a:fillRef>
+          <a:effectRef idx="2">
+            <a:schemeClr val="accent1"/>
+          </a:effectRef>
+          <a:fontRef idx="minor">
+            <a:schemeClr val="lt1"/>
+          </a:fontRef>
+        </p:style>
+        <p:txBody>
+          <a:bodyPr rtlCol="0" anchor="ctr"/>
+          <a:lstStyle/>
+          <a:p>
+            <a:pPr algn="ctr"/>
+          </a:p>
+        </p:txBody>
+      </p:sp>
+      <p:sp>
+        <p:nvSpPr>
+          <p:cNvPr id="17" name="TextBox 16"/>
+          <p:cNvSpPr txBox="1"/>
+          <p:nvPr/>
+        </p:nvSpPr>
+        <p:spPr>
+          <a:xfrm>
+            <a:off x="777240" y="4507992"/>
+            <a:ext cx="1417320" cy="256032"/>
+          </a:xfrm>
+          <a:prstGeom prst="rect">
+            <a:avLst/>
+          </a:prstGeom>
+          <a:noFill/>
+        </p:spPr>
+        <p:txBody>
+          <a:bodyPr wrap="square" anchor="t">
+            <a:spAutoFit/>
+          </a:bodyPr>
+          <a:lstStyle/>
+          <a:p>
+            <a:pPr algn="l"/>
+            <a:r>
+              <a:rPr sz="1100" b="1">
+                <a:solidFill>
+                  <a:srgbClr val="43C2A9"/>
+                </a:solidFill>
+                <a:latin typeface="Segoe UI"/>
+              </a:rPr>
+              <a:t>Implementation</a:t>
+            </a:r>
+          </a:p>
+        </p:txBody>
+      </p:sp>
+      <p:sp>
+        <p:nvSpPr>
+          <p:cNvPr id="18" name="TextBox 17"/>
+          <p:cNvSpPr txBox="1"/>
+          <p:nvPr/>
+        </p:nvSpPr>
+        <p:spPr>
+          <a:xfrm>
+            <a:off x="2286000" y="4526279"/>
+            <a:ext cx="5943600" cy="411480"/>
+          </a:xfrm>
+          <a:prstGeom prst="rect">
+            <a:avLst/>
+          </a:prstGeom>
+          <a:noFill/>
+        </p:spPr>
+        <p:txBody>
+          <a:bodyPr wrap="square" anchor="t">
+            <a:spAutoFit/>
+          </a:bodyPr>
+          <a:lstStyle/>
+          <a:p>
+            <a:pPr algn="l"/>
+            <a:r>
+              <a:rPr sz="1200" b="0">
+                <a:solidFill>
+                  <a:srgbClr val="9EB0AC"/>
+                </a:solidFill>
+                <a:latin typeface="Segoe UI"/>
+              </a:rPr>
+              <a:t>Fixed fee by complexity: orchestrator only vs core API + BYOK</a:t>
+            </a:r>
+          </a:p>
+        </p:txBody>
+      </p:sp>
+      <p:sp>
+        <p:nvSpPr>
+          <p:cNvPr id="19" name="Rounded Rectangle 18"/>
+          <p:cNvSpPr/>
+          <p:nvPr/>
+        </p:nvSpPr>
+        <p:spPr>
+          <a:xfrm>
+            <a:off x="594360" y="5148072"/>
+            <a:ext cx="7955279" cy="658368"/>
+          </a:xfrm>
+          <a:prstGeom prst="roundRect">
+            <a:avLst/>
+          </a:prstGeom>
+          <a:solidFill>
+            <a:srgbClr val="141917"/>
+          </a:solidFill>
+          <a:ln w="9525">
+            <a:solidFill>
+              <a:srgbClr val="273A38"/>
+            </a:solidFill>
+          </a:ln>
+        </p:spPr>
+        <p:style>
+          <a:lnRef idx="1">
+            <a:schemeClr val="accent1"/>
+          </a:lnRef>
+          <a:fillRef idx="3">
+            <a:schemeClr val="accent1"/>
+          </a:fillRef>
+          <a:effectRef idx="2">
+            <a:schemeClr val="accent1"/>
+          </a:effectRef>
+          <a:fontRef idx="minor">
+            <a:schemeClr val="lt1"/>
+          </a:fontRef>
+        </p:style>
+        <p:txBody>
+          <a:bodyPr rtlCol="0" anchor="ctr"/>
+          <a:lstStyle/>
+          <a:p>
+            <a:pPr algn="ctr"/>
+          </a:p>
+        </p:txBody>
+      </p:sp>
+      <p:sp>
+        <p:nvSpPr>
+          <p:cNvPr id="20" name="TextBox 19"/>
+          <p:cNvSpPr txBox="1"/>
+          <p:nvPr/>
+        </p:nvSpPr>
+        <p:spPr>
+          <a:xfrm>
+            <a:off x="777240" y="5257800"/>
+            <a:ext cx="1417320" cy="256032"/>
+          </a:xfrm>
+          <a:prstGeom prst="rect">
+            <a:avLst/>
+          </a:prstGeom>
+          <a:noFill/>
+        </p:spPr>
+        <p:txBody>
+          <a:bodyPr wrap="square" anchor="t">
+            <a:spAutoFit/>
+          </a:bodyPr>
+          <a:lstStyle/>
+          <a:p>
+            <a:pPr algn="l"/>
+            <a:r>
+              <a:rPr sz="1100" b="1">
+                <a:solidFill>
+                  <a:srgbClr val="43C2A9"/>
+                </a:solidFill>
+                <a:latin typeface="Segoe UI"/>
+              </a:rPr>
+              <a:t>Success</a:t>
+            </a:r>
+          </a:p>
+        </p:txBody>
+      </p:sp>
+      <p:sp>
+        <p:nvSpPr>
+          <p:cNvPr id="21" name="TextBox 20"/>
+          <p:cNvSpPr txBox="1"/>
+          <p:nvPr/>
+        </p:nvSpPr>
+        <p:spPr>
+          <a:xfrm>
+            <a:off x="2286000" y="5276088"/>
+            <a:ext cx="5943600" cy="411480"/>
+          </a:xfrm>
+          <a:prstGeom prst="rect">
+            <a:avLst/>
+          </a:prstGeom>
+          <a:noFill/>
+        </p:spPr>
+        <p:txBody>
+          <a:bodyPr wrap="square" anchor="t">
+            <a:spAutoFit/>
+          </a:bodyPr>
+          <a:lstStyle/>
+          <a:p>
+            <a:pPr algn="l"/>
+            <a:r>
+              <a:rPr sz="1200" b="0">
+                <a:solidFill>
+                  <a:srgbClr val="9EB0AC"/>
+                </a:solidFill>
+                <a:latin typeface="Segoe UI"/>
+              </a:rPr>
+              <a:t>Workflow runs faster. Your audit team validates the proof without Salanor in the room.</a:t>
+            </a:r>
+          </a:p>
+        </p:txBody>
+      </p:sp>
+      <p:sp>
+        <p:nvSpPr>
+          <p:cNvPr id="22" name="TextBox 21"/>
+          <p:cNvSpPr txBox="1"/>
+          <p:nvPr/>
+        </p:nvSpPr>
+        <p:spPr>
+          <a:xfrm>
+            <a:off x="594360" y="5806440"/>
+            <a:ext cx="7955279" cy="274320"/>
+          </a:xfrm>
+          <a:prstGeom prst="rect">
+            <a:avLst/>
+          </a:prstGeom>
+          <a:noFill/>
+        </p:spPr>
+        <p:txBody>
+          <a:bodyPr wrap="square" anchor="t">
+            <a:spAutoFit/>
+          </a:bodyPr>
+          <a:lstStyle/>
+          <a:p>
+            <a:pPr algn="l"/>
+            <a:r>
+              <a:rPr sz="1000" b="0">
+                <a:solidFill>
+                  <a:srgbClr val="718582"/>
+                </a:solidFill>
+                <a:latin typeface="Segoe UI"/>
+              </a:rPr>
+              <a:t>api.salanor.com · app.salanor.com · n8n, TypeScript, Python, Go SDKs</a:t>
+            </a:r>
+          </a:p>
+        </p:txBody>
+      </p:sp>
+    </p:spTree>
+  </p:cSld>
+  <p:clrMapOvr>
+    <a:masterClrMapping/>
+  </p:clrMapOvr>
+</p:sld>
+</file>
+
+<file path=ppt/slides/slide21.xml><?xml version="1.0" encoding="utf-8"?>
+<p:sld xmlns:a="http://schemas.openxmlformats.org/drawingml/2006/main" xmlns:p="http://schemas.openxmlformats.org/presentationml/2006/main" xmlns:r="http://schemas.openxmlformats.org/officeDocument/2006/relationships">
+  <p:cSld>
+    <p:bg>
+      <p:bgPr>
+        <a:solidFill>
+          <a:srgbClr val="0A0C0B"/>
+        </a:solidFill>
+        <a:effectLst/>
+      </p:bgPr>
+    </p:bg>
+    <p:spTree>
+      <p:nvGrpSpPr>
+        <p:cNvPr id="1" name=""/>
+        <p:cNvGrpSpPr/>
+        <p:nvPr/>
+      </p:nvGrpSpPr>
+      <p:grpSpPr/>
+      <p:pic>
+        <p:nvPicPr>
+          <p:cNvPr id="2" name="Picture 1" descr="salanor-logo.png"/>
+          <p:cNvPicPr>
+            <a:picLocks noChangeAspect="1"/>
+          </p:cNvPicPr>
+          <p:nvPr/>
+        </p:nvPicPr>
+        <p:blipFill>
+          <a:blip r:embed="rId2"/>
+          <a:stretch>
+            <a:fillRect/>
+          </a:stretch>
+        </p:blipFill>
+        <p:spPr>
+          <a:xfrm>
+            <a:off x="594360" y="384048"/>
+            <a:ext cx="347472" cy="347472"/>
+          </a:xfrm>
+          <a:prstGeom prst="rect">
+            <a:avLst/>
+          </a:prstGeom>
+        </p:spPr>
+      </p:pic>
+      <p:sp>
+        <p:nvSpPr>
+          <p:cNvPr id="3" name="TextBox 2"/>
+          <p:cNvSpPr txBox="1"/>
+          <p:nvPr/>
+        </p:nvSpPr>
+        <p:spPr>
+          <a:xfrm>
+            <a:off x="987552" y="438912"/>
+            <a:ext cx="1097280" cy="228600"/>
+          </a:xfrm>
+          <a:prstGeom prst="rect">
+            <a:avLst/>
+          </a:prstGeom>
+          <a:noFill/>
+        </p:spPr>
+        <p:txBody>
+          <a:bodyPr wrap="square" anchor="t">
+            <a:spAutoFit/>
+          </a:bodyPr>
+          <a:lstStyle/>
+          <a:p>
+            <a:pPr algn="l"/>
+            <a:r>
+              <a:rPr sz="900" b="1">
+                <a:solidFill>
+                  <a:srgbClr val="718582"/>
+                </a:solidFill>
+                <a:latin typeface="Segoe UI"/>
+              </a:rPr>
+              <a:t>SALANOR</a:t>
+            </a:r>
+          </a:p>
+        </p:txBody>
+      </p:sp>
+      <p:sp>
+        <p:nvSpPr>
+          <p:cNvPr id="4" name="TextBox 3"/>
+          <p:cNvSpPr txBox="1"/>
+          <p:nvPr/>
+        </p:nvSpPr>
+        <p:spPr>
+          <a:xfrm>
+            <a:off x="594360" y="749808"/>
+            <a:ext cx="7955279" cy="256032"/>
+          </a:xfrm>
+          <a:prstGeom prst="rect">
+            <a:avLst/>
+          </a:prstGeom>
+          <a:noFill/>
+        </p:spPr>
+        <p:txBody>
+          <a:bodyPr wrap="square" anchor="t">
+            <a:spAutoFit/>
+          </a:bodyPr>
+          <a:lstStyle/>
+          <a:p>
+            <a:pPr algn="l"/>
+            <a:r>
+              <a:rPr sz="900" b="1">
+                <a:solidFill>
+                  <a:srgbClr val="43C2A9"/>
+                </a:solidFill>
+                <a:latin typeface="Segoe UI"/>
+              </a:rPr>
+              <a:t>NEXT STEP</a:t>
+            </a:r>
+          </a:p>
+        </p:txBody>
+      </p:sp>
+      <p:sp>
+        <p:nvSpPr>
+          <p:cNvPr id="5" name="TextBox 4"/>
+          <p:cNvSpPr txBox="1"/>
+          <p:nvPr/>
+        </p:nvSpPr>
+        <p:spPr>
+          <a:xfrm>
+            <a:off x="594360" y="960120"/>
+            <a:ext cx="7955279" cy="777240"/>
+          </a:xfrm>
+          <a:prstGeom prst="rect">
+            <a:avLst/>
+          </a:prstGeom>
+          <a:noFill/>
+        </p:spPr>
+        <p:txBody>
+          <a:bodyPr wrap="square" anchor="t">
+            <a:spAutoFit/>
+          </a:bodyPr>
+          <a:lstStyle/>
+          <a:p>
+            <a:pPr algn="l"/>
+            <a:r>
+              <a:rPr sz="2400" b="1">
+                <a:solidFill>
+                  <a:srgbClr val="E8EDE9"/>
+                </a:solidFill>
+                <a:latin typeface="Segoe UI"/>
+              </a:rPr>
+              <a:t>Questions, a use case, or want to see more? Book a call.</a:t>
+            </a:r>
+          </a:p>
+        </p:txBody>
+      </p:sp>
+      <p:sp>
+        <p:nvSpPr>
+          <p:cNvPr id="6" name="Rectangle 5"/>
+          <p:cNvSpPr/>
+          <p:nvPr/>
+        </p:nvSpPr>
+        <p:spPr>
+          <a:xfrm>
+            <a:off x="594360" y="1719072"/>
+            <a:ext cx="1005840" cy="41148"/>
+          </a:xfrm>
+          <a:prstGeom prst="rect">
+            <a:avLst/>
+          </a:prstGeom>
+          <a:solidFill>
+            <a:srgbClr val="43C2A9"/>
+          </a:solidFill>
+          <a:ln>
+            <a:noFill/>
+          </a:ln>
+        </p:spPr>
+        <p:style>
+          <a:lnRef idx="1">
+            <a:schemeClr val="accent1"/>
+          </a:lnRef>
+          <a:fillRef idx="3">
+            <a:schemeClr val="accent1"/>
+          </a:fillRef>
+          <a:effectRef idx="2">
+            <a:schemeClr val="accent1"/>
+          </a:effectRef>
+          <a:fontRef idx="minor">
+            <a:schemeClr val="lt1"/>
+          </a:fontRef>
+        </p:style>
+        <p:txBody>
+          <a:bodyPr rtlCol="0" anchor="ctr"/>
+          <a:lstStyle/>
+          <a:p>
+            <a:pPr algn="ctr"/>
+          </a:p>
+        </p:txBody>
+      </p:sp>
+      <p:sp>
+        <p:nvSpPr>
+          <p:cNvPr id="7" name="Rounded Rectangle 6"/>
+          <p:cNvSpPr/>
+          <p:nvPr/>
+        </p:nvSpPr>
+        <p:spPr>
+          <a:xfrm>
+            <a:off x="594360" y="2240280"/>
+            <a:ext cx="2514600" cy="2148840"/>
+          </a:xfrm>
+          <a:prstGeom prst="roundRect">
+            <a:avLst/>
+          </a:prstGeom>
+          <a:solidFill>
+            <a:srgbClr val="141917"/>
+          </a:solidFill>
+          <a:ln w="9525">
+            <a:solidFill>
+              <a:srgbClr val="273A38"/>
+            </a:solidFill>
+          </a:ln>
+        </p:spPr>
+        <p:style>
+          <a:lnRef idx="1">
+            <a:schemeClr val="accent1"/>
+          </a:lnRef>
+          <a:fillRef idx="3">
+            <a:schemeClr val="accent1"/>
+          </a:fillRef>
+          <a:effectRef idx="2">
+            <a:schemeClr val="accent1"/>
+          </a:effectRef>
+          <a:fontRef idx="minor">
+            <a:schemeClr val="lt1"/>
+          </a:fontRef>
+        </p:style>
+        <p:txBody>
+          <a:bodyPr rtlCol="0" anchor="ctr"/>
+          <a:lstStyle/>
+          <a:p>
+            <a:pPr algn="ctr"/>
+          </a:p>
+        </p:txBody>
+      </p:sp>
+      <p:sp>
+        <p:nvSpPr>
+          <p:cNvPr id="8" name="TextBox 7"/>
+          <p:cNvSpPr txBox="1"/>
+          <p:nvPr/>
+        </p:nvSpPr>
+        <p:spPr>
+          <a:xfrm>
+            <a:off x="758952" y="2441448"/>
+            <a:ext cx="2240280" cy="411480"/>
+          </a:xfrm>
+          <a:prstGeom prst="rect">
+            <a:avLst/>
+          </a:prstGeom>
+          <a:noFill/>
+        </p:spPr>
+        <p:txBody>
+          <a:bodyPr wrap="square" anchor="t">
+            <a:spAutoFit/>
+          </a:bodyPr>
+          <a:lstStyle/>
+          <a:p>
+            <a:pPr algn="l"/>
+            <a:r>
+              <a:rPr sz="1300" b="1">
+                <a:solidFill>
+                  <a:srgbClr val="43C2A9"/>
+                </a:solidFill>
+                <a:latin typeface="Segoe UI"/>
+              </a:rPr>
+              <a:t>15 minutes</a:t>
+            </a:r>
+          </a:p>
+        </p:txBody>
+      </p:sp>
+      <p:sp>
+        <p:nvSpPr>
+          <p:cNvPr id="9" name="TextBox 8"/>
+          <p:cNvSpPr txBox="1"/>
+          <p:nvPr/>
+        </p:nvSpPr>
+        <p:spPr>
+          <a:xfrm>
+            <a:off x="758952" y="2898648"/>
+            <a:ext cx="2240280" cy="1325880"/>
+          </a:xfrm>
+          <a:prstGeom prst="rect">
+            <a:avLst/>
+          </a:prstGeom>
+          <a:noFill/>
+        </p:spPr>
+        <p:txBody>
+          <a:bodyPr wrap="square" anchor="t">
+            <a:spAutoFit/>
+          </a:bodyPr>
+          <a:lstStyle/>
+          <a:p>
+            <a:pPr algn="l"/>
+            <a:r>
+              <a:rPr sz="1100" b="0">
+                <a:solidFill>
+                  <a:srgbClr val="9EB0AC"/>
+                </a:solidFill>
+                <a:latin typeface="Segoe UI"/>
+              </a:rPr>
+              <a:t>Short intro, Q&amp;A, console preview or live demo</a:t>
+            </a:r>
+          </a:p>
+        </p:txBody>
+      </p:sp>
+      <p:sp>
+        <p:nvSpPr>
+          <p:cNvPr id="10" name="Rounded Rectangle 9"/>
+          <p:cNvSpPr/>
+          <p:nvPr/>
+        </p:nvSpPr>
+        <p:spPr>
+          <a:xfrm>
+            <a:off x="3310128" y="2240280"/>
+            <a:ext cx="2514600" cy="2148840"/>
+          </a:xfrm>
+          <a:prstGeom prst="roundRect">
+            <a:avLst/>
+          </a:prstGeom>
+          <a:solidFill>
+            <a:srgbClr val="141917"/>
+          </a:solidFill>
+          <a:ln w="9525">
+            <a:solidFill>
+              <a:srgbClr val="273A38"/>
+            </a:solidFill>
+          </a:ln>
+        </p:spPr>
+        <p:style>
+          <a:lnRef idx="1">
+            <a:schemeClr val="accent1"/>
+          </a:lnRef>
+          <a:fillRef idx="3">
+            <a:schemeClr val="accent1"/>
+          </a:fillRef>
+          <a:effectRef idx="2">
+            <a:schemeClr val="accent1"/>
+          </a:effectRef>
+          <a:fontRef idx="minor">
+            <a:schemeClr val="lt1"/>
+          </a:fontRef>
+        </p:style>
+        <p:txBody>
+          <a:bodyPr rtlCol="0" anchor="ctr"/>
+          <a:lstStyle/>
+          <a:p>
+            <a:pPr algn="ctr"/>
+          </a:p>
+        </p:txBody>
+      </p:sp>
+      <p:sp>
+        <p:nvSpPr>
+          <p:cNvPr id="11" name="TextBox 10"/>
+          <p:cNvSpPr txBox="1"/>
+          <p:nvPr/>
+        </p:nvSpPr>
+        <p:spPr>
+          <a:xfrm>
+            <a:off x="3474720" y="2441448"/>
+            <a:ext cx="2240280" cy="411480"/>
+          </a:xfrm>
+          <a:prstGeom prst="rect">
+            <a:avLst/>
+          </a:prstGeom>
+          <a:noFill/>
+        </p:spPr>
+        <p:txBody>
+          <a:bodyPr wrap="square" anchor="t">
+            <a:spAutoFit/>
+          </a:bodyPr>
+          <a:lstStyle/>
+          <a:p>
+            <a:pPr algn="l"/>
+            <a:r>
+              <a:rPr sz="1300" b="1">
+                <a:solidFill>
+                  <a:srgbClr val="43C2A9"/>
+                </a:solidFill>
+                <a:latin typeface="Segoe UI"/>
+              </a:rPr>
+              <a:t>45 minutes</a:t>
+            </a:r>
+          </a:p>
+        </p:txBody>
+      </p:sp>
+      <p:sp>
+        <p:nvSpPr>
+          <p:cNvPr id="12" name="TextBox 11"/>
+          <p:cNvSpPr txBox="1"/>
+          <p:nvPr/>
+        </p:nvSpPr>
+        <p:spPr>
+          <a:xfrm>
+            <a:off x="3474720" y="2898648"/>
+            <a:ext cx="2240280" cy="1325880"/>
+          </a:xfrm>
+          <a:prstGeom prst="rect">
+            <a:avLst/>
+          </a:prstGeom>
+          <a:noFill/>
+        </p:spPr>
+        <p:txBody>
+          <a:bodyPr wrap="square" anchor="t">
+            <a:spAutoFit/>
+          </a:bodyPr>
+          <a:lstStyle/>
+          <a:p>
+            <a:pPr algn="l"/>
+            <a:r>
+              <a:rPr sz="1100" b="0">
+                <a:solidFill>
+                  <a:srgbClr val="9EB0AC"/>
+                </a:solidFill>
+                <a:latin typeface="Segoe UI"/>
+              </a:rPr>
+              <a:t>Scoping with ops, risk, or IT: pick one workflow and define success</a:t>
+            </a:r>
+          </a:p>
+        </p:txBody>
+      </p:sp>
+      <p:sp>
+        <p:nvSpPr>
+          <p:cNvPr id="13" name="Rounded Rectangle 12"/>
+          <p:cNvSpPr/>
+          <p:nvPr/>
+        </p:nvSpPr>
+        <p:spPr>
+          <a:xfrm>
+            <a:off x="6025896" y="2240280"/>
+            <a:ext cx="2514600" cy="2148840"/>
+          </a:xfrm>
+          <a:prstGeom prst="roundRect">
+            <a:avLst/>
+          </a:prstGeom>
+          <a:solidFill>
+            <a:srgbClr val="141917"/>
+          </a:solidFill>
+          <a:ln w="9525">
+            <a:solidFill>
+              <a:srgbClr val="273A38"/>
+            </a:solidFill>
+          </a:ln>
+        </p:spPr>
+        <p:style>
+          <a:lnRef idx="1">
+            <a:schemeClr val="accent1"/>
+          </a:lnRef>
+          <a:fillRef idx="3">
+            <a:schemeClr val="accent1"/>
+          </a:fillRef>
+          <a:effectRef idx="2">
+            <a:schemeClr val="accent1"/>
+          </a:effectRef>
+          <a:fontRef idx="minor">
+            <a:schemeClr val="lt1"/>
+          </a:fontRef>
+        </p:style>
+        <p:txBody>
+          <a:bodyPr rtlCol="0" anchor="ctr"/>
+          <a:lstStyle/>
+          <a:p>
+            <a:pPr algn="ctr"/>
+          </a:p>
+        </p:txBody>
+      </p:sp>
+      <p:sp>
+        <p:nvSpPr>
+          <p:cNvPr id="14" name="TextBox 13"/>
+          <p:cNvSpPr txBox="1"/>
+          <p:nvPr/>
+        </p:nvSpPr>
+        <p:spPr>
+          <a:xfrm>
+            <a:off x="6190488" y="2441448"/>
+            <a:ext cx="2240280" cy="411480"/>
+          </a:xfrm>
+          <a:prstGeom prst="rect">
+            <a:avLst/>
+          </a:prstGeom>
+          <a:noFill/>
+        </p:spPr>
+        <p:txBody>
+          <a:bodyPr wrap="square" anchor="t">
+            <a:spAutoFit/>
+          </a:bodyPr>
+          <a:lstStyle/>
+          <a:p>
+            <a:pPr algn="l"/>
+            <a:r>
+              <a:rPr sz="1300" b="1">
+                <a:solidFill>
+                  <a:srgbClr val="43C2A9"/>
+                </a:solidFill>
+                <a:latin typeface="Segoe UI"/>
+              </a:rPr>
+              <a:t>On request</a:t>
+            </a:r>
+          </a:p>
+        </p:txBody>
+      </p:sp>
+      <p:sp>
+        <p:nvSpPr>
+          <p:cNvPr id="15" name="TextBox 14"/>
+          <p:cNvSpPr txBox="1"/>
+          <p:nvPr/>
+        </p:nvSpPr>
+        <p:spPr>
+          <a:xfrm>
+            <a:off x="6190488" y="2898648"/>
+            <a:ext cx="2240280" cy="1325880"/>
+          </a:xfrm>
+          <a:prstGeom prst="rect">
+            <a:avLst/>
+          </a:prstGeom>
+          <a:noFill/>
+        </p:spPr>
+        <p:txBody>
+          <a:bodyPr wrap="square" anchor="t">
+            <a:spAutoFit/>
+          </a:bodyPr>
+          <a:lstStyle/>
+          <a:p>
+            <a:pPr algn="l"/>
+            <a:r>
+              <a:rPr sz="1100" b="0">
+                <a:solidFill>
+                  <a:srgbClr val="9EB0AC"/>
+                </a:solidFill>
+                <a:latin typeface="Segoe UI"/>
+              </a:rPr>
+              <a:t>Sample audit export, one-pager, or demo on your scenario</a:t>
+            </a:r>
+          </a:p>
+        </p:txBody>
+      </p:sp>
+      <p:sp>
+        <p:nvSpPr>
+          <p:cNvPr id="16" name="TextBox 15"/>
+          <p:cNvSpPr txBox="1"/>
+          <p:nvPr/>
+        </p:nvSpPr>
+        <p:spPr>
+          <a:xfrm>
+            <a:off x="594360" y="4709160"/>
+            <a:ext cx="7955279" cy="502920"/>
+          </a:xfrm>
+          <a:prstGeom prst="rect">
+            <a:avLst/>
+          </a:prstGeom>
+          <a:noFill/>
+        </p:spPr>
+        <p:txBody>
+          <a:bodyPr wrap="square" anchor="t">
+            <a:spAutoFit/>
+          </a:bodyPr>
+          <a:lstStyle/>
+          <a:p>
+            <a:pPr algn="l"/>
+            <a:r>
+              <a:rPr sz="1200" b="0">
+                <a:solidFill>
+                  <a:srgbClr val="9EB0AC"/>
+                </a:solidFill>
+                <a:latin typeface="Segoe UI"/>
+              </a:rPr>
+              <a:t>Email me directly. If someone introduced you, they can help set up the call.</a:t>
+            </a:r>
+          </a:p>
+        </p:txBody>
+      </p:sp>
+      <p:sp>
+        <p:nvSpPr>
+          <p:cNvPr id="17" name="TextBox 16"/>
+          <p:cNvSpPr txBox="1"/>
+          <p:nvPr/>
+        </p:nvSpPr>
+        <p:spPr>
+          <a:xfrm>
+            <a:off x="594360" y="5349240"/>
+            <a:ext cx="7955279" cy="411480"/>
+          </a:xfrm>
+          <a:prstGeom prst="rect">
+            <a:avLst/>
+          </a:prstGeom>
+          <a:noFill/>
+        </p:spPr>
+        <p:txBody>
+          <a:bodyPr wrap="square" anchor="t">
+            <a:spAutoFit/>
+          </a:bodyPr>
+          <a:lstStyle/>
+          <a:p>
+            <a:pPr algn="l"/>
+            <a:r>
+              <a:rPr sz="1300" b="1">
+                <a:solidFill>
+                  <a:srgbClr val="E8EDE9"/>
+                </a:solidFill>
+                <a:latin typeface="Segoe UI"/>
+              </a:rPr>
+              <a:t>hello@salanor.com · partners@salanor.com · app.salanor.com</a:t>
+            </a:r>
+          </a:p>
+        </p:txBody>
+      </p:sp>
+    </p:spTree>
+  </p:cSld>
+  <p:clrMapOvr>
+    <a:masterClrMapping/>
+  </p:clrMapOvr>
+</p:sld>
+</file>
+
+<file path=ppt/slides/slide22.xml><?xml version="1.0" encoding="utf-8"?>
 <p:sld xmlns:a="http://schemas.openxmlformats.org/drawingml/2006/main" xmlns:p="http://schemas.openxmlformats.org/presentationml/2006/main" xmlns:r="http://schemas.openxmlformats.org/officeDocument/2006/relationships">
   <p:cSld>
     <p:bg>
@@ -10986,7 +12360,7 @@
                 </a:solidFill>
                 <a:latin typeface="Segoe UI"/>
               </a:rPr>
-              <a:t>Automation removes friction around sensitive decisions — it does not remove humans from them.</a:t>
+              <a:t>Automation removes friction around sensitive decisions. It does not remove humans from them.</a:t>
             </a:r>
           </a:p>
         </p:txBody>
@@ -11141,7 +12515,7 @@
                 </a:solidFill>
                 <a:latin typeface="Segoe UI"/>
               </a:rPr>
-              <a:t>High-value starting points — pick one for a pilot</a:t>
+              <a:t>High-value starting points. Pick one workflow.</a:t>
             </a:r>
           </a:p>
         </p:txBody>
@@ -11223,7 +12597,7 @@
                 </a:solidFill>
                 <a:latin typeface="Segoe UI"/>
               </a:rPr>
-              <a:t>Outbound payments above threshold → approval before execution</a:t>
+              <a:t>Outbound payments above threshold: approval before execution</a:t>
             </a:r>
           </a:p>
           <a:p>
@@ -11239,7 +12613,7 @@
                 </a:solidFill>
                 <a:latin typeface="Segoe UI"/>
               </a:rPr>
-              <a:t>KYC / AML document checks → route exceptions, flag incomplete files</a:t>
+              <a:t>KYC / AML document checks: route exceptions, flag incomplete files</a:t>
             </a:r>
           </a:p>
           <a:p>
@@ -11255,7 +12629,7 @@
                 </a:solidFill>
                 <a:latin typeface="Segoe UI"/>
               </a:rPr>
-              <a:t>Limit or account status changes → dual control before core update</a:t>
+              <a:t>Limit or account status changes: dual control before core update</a:t>
             </a:r>
           </a:p>
           <a:p>
@@ -11271,7 +12645,7 @@
                 </a:solidFill>
                 <a:latin typeface="Segoe UI"/>
               </a:rPr>
-              <a:t>Reconciliation alerts → surface mismatches with context to the right team</a:t>
+              <a:t>Reconciliation alerts: surface mismatches with context to the right team</a:t>
             </a:r>
           </a:p>
         </p:txBody>
@@ -11426,7 +12800,7 @@
                 </a:solidFill>
                 <a:latin typeface="Segoe UI"/>
               </a:rPr>
-              <a:t>Same logic — one workflow, measurable outcome</a:t>
+              <a:t>Same logic. One workflow, measurable outcome.</a:t>
             </a:r>
           </a:p>
         </p:txBody>
@@ -11508,7 +12882,7 @@
                 </a:solidFill>
                 <a:latin typeface="Segoe UI"/>
               </a:rPr>
-              <a:t>Claims intake and routing — by type, amount, or fraud score</a:t>
+              <a:t>Claims intake and routing by type, amount, or fraud score</a:t>
             </a:r>
           </a:p>
           <a:p>
@@ -11524,7 +12898,7 @@
                 </a:solidFill>
                 <a:latin typeface="Segoe UI"/>
               </a:rPr>
-              <a:t>Claim settlement or disbursement — block above threshold until sign-off</a:t>
+              <a:t>Claim settlement or disbursement: block above threshold until sign-off</a:t>
             </a:r>
           </a:p>
           <a:p>
@@ -11540,7 +12914,7 @@
                 </a:solidFill>
                 <a:latin typeface="Segoe UI"/>
               </a:rPr>
-              <a:t>Policy changes in production — premium, coverage, beneficiary updates</a:t>
+              <a:t>Policy changes in production: premium, coverage, beneficiary updates</a:t>
             </a:r>
           </a:p>
           <a:p>
@@ -11556,7 +12930,7 @@
                 </a:solidFill>
                 <a:latin typeface="Segoe UI"/>
               </a:rPr>
-              <a:t>Regulatory or partner reporting — gather, validate, transmit with record</a:t>
+              <a:t>Regulatory or partner reporting: gather, validate, transmit with record</a:t>
             </a:r>
           </a:p>
         </p:txBody>
@@ -13134,7 +14508,7 @@
                 </a:solidFill>
                 <a:latin typeface="Segoe UI"/>
               </a:rPr>
-              <a:t>Wrong payment executes instantly — no natural pause to catch it</a:t>
+              <a:t>Wrong payment executes instantly. No natural pause to catch it.</a:t>
             </a:r>
           </a:p>
           <a:p>
@@ -13182,7 +14556,7 @@
                 </a:solidFill>
                 <a:latin typeface="Segoe UI"/>
               </a:rPr>
-              <a:t>“Who authorized this Tuesday at 2 p.m.?” → scattered logs, tickets, chat</a:t>
+              <a:t>Who authorized this Tuesday at 2 p.m.? Scattered logs, tickets, chat.</a:t>
             </a:r>
           </a:p>
         </p:txBody>
@@ -13645,7 +15019,7 @@
                 </a:solidFill>
                 <a:latin typeface="Segoe UI"/>
               </a:rPr>
-              <a:t>Risk boards block the next project — no trail from the last one</a:t>
+              <a:t>Risk boards block the next project. No trail from the last one.</a:t>
             </a:r>
           </a:p>
         </p:txBody>
